--- a/Final_Revision/Exam_Practice/FR-L05_Speaking_Workshop_Mixed_Mock_Exam_1.pptx
+++ b/Final_Revision/Exam_Practice/FR-L05_Speaking_Workshop_Mixed_Mock_Exam_1.pptx
@@ -615,7 +615,11 @@
           <a:lstStyle/>
           <a:p>
             <a:r>
-              <a:rPr lang="en-US" dirty="0"/>
+              <a:rPr lang="ar-SA" dirty="0">
+                <a:latin typeface="Amiri" pitchFamily="2" charset="-78"/>
+                <a:ea typeface="Amiri" pitchFamily="2" charset="-78"/>
+                <a:cs typeface="Amiri" pitchFamily="2" charset="-78"/>
+              </a:rPr>
               <a:t>ROLE PLAY C (Develop) — a youth-club interview.
 SET-UP IN THE BREAKOUT ROOM: A = examiner (reads the left column ONLY — the questions, in order), B = candidate (sees the task column; Core may use the help column), C = observer (ticks the feedback checklist). 1 minute preparation, about 3 minutes speaking, 1 minute feedback, then rotate.
 Task ! is the unexpected question: in the exam the candidate has not seen it — the examiner should read it without warning.
@@ -707,7 +711,11 @@
           <a:lstStyle/>
           <a:p>
             <a:r>
-              <a:rPr lang="en-US" dirty="0"/>
+              <a:rPr lang="ar-SA" dirty="0">
+                <a:latin typeface="Amiri" pitchFamily="2" charset="-78"/>
+                <a:ea typeface="Amiri" pitchFamily="2" charset="-78"/>
+                <a:cs typeface="Amiri" pitchFamily="2" charset="-78"/>
+              </a:rPr>
               <a:t>ROLE PLAY D (Stretch) — a radio debate.
 SET-UP IN THE BREAKOUT ROOM: A = examiner (reads the left column ONLY — the questions, in order), B = candidate (sees the task column; Core may use the help column), C = observer (ticks the feedback checklist). 1 minute preparation, about 3 minutes speaking, 1 minute feedback, then rotate.
 Task ! is the unexpected question: in the exam the candidate has not seen it — the examiner should read it without warning.
@@ -1243,7 +1251,11 @@
           <a:lstStyle/>
           <a:p>
             <a:r>
-              <a:rPr lang="en-US" dirty="0"/>
+              <a:rPr lang="ar-SA" dirty="0">
+                <a:latin typeface="Amiri" pitchFamily="2" charset="-78"/>
+                <a:ea typeface="Amiri" pitchFamily="2" charset="-78"/>
+                <a:cs typeface="Amiri" pitchFamily="2" charset="-78"/>
+              </a:rPr>
               <a:t>TOPIC CONVERSATION — Core. Examiner asks the questions in order and may add “لِمَاذَا؟ / هَلْ يُمْكِنُ أَنْ تَشْرَحَ أَكْثَرَ؟” to push for more. Candidate aims for one full sentence per question — each from a different topic.
 </a:t>
             </a:r>
@@ -1332,7 +1344,11 @@
           <a:lstStyle/>
           <a:p>
             <a:r>
-              <a:rPr lang="en-US" dirty="0"/>
+              <a:rPr lang="ar-SA" dirty="0">
+                <a:latin typeface="Amiri" pitchFamily="2" charset="-78"/>
+                <a:ea typeface="Amiri" pitchFamily="2" charset="-78"/>
+                <a:cs typeface="Amiri" pitchFamily="2" charset="-78"/>
+              </a:rPr>
               <a:t>TOPIC CONVERSATION — Develop. Examiner asks the questions in order and may add “لِمَاذَا؟ / هَلْ يُمْكِنُ أَنْ تَشْرَحَ أَكْثَرَ؟” to push for more. Candidate aims for two or three sentences, with a reason and two time frames.
 </a:t>
             </a:r>
@@ -1421,7 +1437,11 @@
           <a:lstStyle/>
           <a:p>
             <a:r>
-              <a:rPr lang="en-US" dirty="0"/>
+              <a:rPr lang="ar-SA" dirty="0">
+                <a:latin typeface="Amiri" pitchFamily="2" charset="-78"/>
+                <a:ea typeface="Amiri" pitchFamily="2" charset="-78"/>
+                <a:cs typeface="Amiri" pitchFamily="2" charset="-78"/>
+              </a:rPr>
               <a:t>TOPIC CONVERSATION — Stretch. Examiner asks the questions in order and may add “لِمَاذَا؟ / هَلْ يُمْكِنُ أَنْ تَشْرَحَ أَكْثَرَ؟” to push for more. Candidate aims for a developed answer: opinion, balance, concession and a conditional.
 </a:t>
             </a:r>
@@ -1510,7 +1530,11 @@
           <a:lstStyle/>
           <a:p>
             <a:r>
-              <a:rPr lang="en-US" dirty="0"/>
+              <a:rPr lang="ar-SA" dirty="0">
+                <a:latin typeface="Amiri" pitchFamily="2" charset="-78"/>
+                <a:ea typeface="Amiri" pitchFamily="2" charset="-78"/>
+                <a:cs typeface="Amiri" pitchFamily="2" charset="-78"/>
+              </a:rPr>
               <a:t>WELCOME (1 min) — while students join.
 • Greet each student by name as they arrive: السَّلَامُ عَلَيْكُمْ. Take the register (Pastoral Tracker: attendance 0/1).
 • 2-MINUTE CHECK-IN (SEND training): a private chat to any student who seemed unsettled last lesson — “Are you okay today? 👍 / 👎”.
@@ -2224,7 +2248,11 @@
           <a:lstStyle/>
           <a:p>
             <a:r>
-              <a:rPr lang="en-US" dirty="0"/>
+              <a:rPr lang="ar-SA" dirty="0">
+                <a:latin typeface="Amiri" pitchFamily="2" charset="-78"/>
+                <a:ea typeface="Amiri" pitchFamily="2" charset="-78"/>
+                <a:cs typeface="Amiri" pitchFamily="2" charset="-78"/>
+              </a:rPr>
               <a:t>TEACH (3 min). Role play = precise and complete; conversation = develop. Choral repetition of the repair phrases. To a girl: تُعِيدِي.</a:t>
             </a:r>
             <a:endParaRPr lang="en-US" dirty="0"/>
@@ -2576,7 +2604,11 @@
           <a:lstStyle/>
           <a:p>
             <a:r>
-              <a:rPr lang="en-US" dirty="0"/>
+              <a:rPr lang="ar-SA" dirty="0">
+                <a:latin typeface="Amiri" pitchFamily="2" charset="-78"/>
+                <a:ea typeface="Amiri" pitchFamily="2" charset="-78"/>
+                <a:cs typeface="Amiri" pitchFamily="2" charset="-78"/>
+              </a:rPr>
               <a:t>ROLE PLAY A (Core) — a railway station abroad.
 SET-UP IN THE BREAKOUT ROOM: A = examiner (reads the left column ONLY — the questions, in order), B = candidate (sees the task column; Core may use the help column), C = observer (ticks the feedback checklist). 1 minute preparation, about 3 minutes speaking, 1 minute feedback, then rotate.
 Task ! is the unexpected question: in the exam the candidate has not seen it — the examiner should read it without warning.
@@ -2668,7 +2700,11 @@
           <a:lstStyle/>
           <a:p>
             <a:r>
-              <a:rPr lang="en-US" dirty="0"/>
+              <a:rPr lang="ar-SA" dirty="0">
+                <a:latin typeface="Amiri" pitchFamily="2" charset="-78"/>
+                <a:ea typeface="Amiri" pitchFamily="2" charset="-78"/>
+                <a:cs typeface="Amiri" pitchFamily="2" charset="-78"/>
+              </a:rPr>
               <a:t>ROLE PLAY B (Core+) — lost property at an airport.
 SET-UP IN THE BREAKOUT ROOM: A = examiner (reads the left column ONLY — the questions, in order), B = candidate (sees the task column; Core may use the help column), C = observer (ticks the feedback checklist). 1 minute preparation, about 3 minutes speaking, 1 minute feedback, then rotate.
 Task ! is the unexpected question: in the exam the candidate has not seen it — the examiner should read it without warning.
@@ -3156,6 +3192,7 @@
                   <a:srgbClr val="D4AF37"/>
                 </a:solidFill>
                 <a:latin typeface="Amiri" pitchFamily="2" charset="-78"/>
+                <a:ea typeface="Amiri" pitchFamily="2" charset="-78"/>
                 <a:cs typeface="Amiri" pitchFamily="2" charset="-78"/>
               </a:rPr>
               <a:t>م</a:t>
@@ -3362,6 +3399,7 @@
                   <a:srgbClr val="D4AF37"/>
                 </a:solidFill>
                 <a:latin typeface="Amiri" pitchFamily="2" charset="-78"/>
+                <a:ea typeface="Amiri" pitchFamily="2" charset="-78"/>
                 <a:cs typeface="Amiri" pitchFamily="2" charset="-78"/>
               </a:rPr>
               <a:t>وَرْشَةُ التَّحَدُّثِ — امْتِحَانٌ تَجْرِيبِيٌّ شَامِلٌ (١)</a:t>
@@ -3819,6 +3857,7 @@
                   <a:srgbClr val="D4AF37"/>
                 </a:solidFill>
                 <a:latin typeface="Amiri" pitchFamily="2" charset="-78"/>
+                <a:ea typeface="Amiri" pitchFamily="2" charset="-78"/>
                 <a:cs typeface="Amiri" pitchFamily="2" charset="-78"/>
               </a:rPr>
               <a:t>م</a:t>
@@ -4139,6 +4178,7 @@
                   <a:srgbClr val="8A6D1E"/>
                 </a:solidFill>
                 <a:latin typeface="Amiri" pitchFamily="2" charset="-78"/>
+                <a:ea typeface="Amiri" pitchFamily="2" charset="-78"/>
                 <a:cs typeface="Amiri" pitchFamily="2" charset="-78"/>
               </a:rPr>
               <a:t>التَّطَوُّعُ فِي نَادِي الشَّبَابِ</a:t>
@@ -4419,6 +4459,7 @@
                   <a:srgbClr val="1B3B6F"/>
                 </a:solidFill>
                 <a:latin typeface="Amiri" pitchFamily="2" charset="-78"/>
+                <a:ea typeface="Amiri" pitchFamily="2" charset="-78"/>
                 <a:cs typeface="Amiri" pitchFamily="2" charset="-78"/>
               </a:rPr>
               <a:t>أَنَا … وَ… ؛ مَثَلًا …</a:t>
@@ -4495,6 +4536,7 @@
                   <a:srgbClr val="1B3B6F"/>
                 </a:solidFill>
                 <a:latin typeface="Amiri" pitchFamily="2" charset="-78"/>
+                <a:ea typeface="Amiri" pitchFamily="2" charset="-78"/>
                 <a:cs typeface="Amiri" pitchFamily="2" charset="-78"/>
               </a:rPr>
               <a:t>صِفْ نَفْسَكَ بِثَلَاثِ صِفَاتٍ.</a:t>
@@ -4598,6 +4640,7 @@
                   <a:srgbClr val="1B3B6F"/>
                 </a:solidFill>
                 <a:latin typeface="Amiri" pitchFamily="2" charset="-78"/>
+                <a:ea typeface="Amiri" pitchFamily="2" charset="-78"/>
                 <a:cs typeface="Amiri" pitchFamily="2" charset="-78"/>
               </a:rPr>
               <a:t>أَلْعَبُ … مَرَّتَيْنِ … ، لِأَنَّ …</a:t>
@@ -4674,6 +4717,7 @@
                   <a:srgbClr val="1B3B6F"/>
                 </a:solidFill>
                 <a:latin typeface="Amiri" pitchFamily="2" charset="-78"/>
+                <a:ea typeface="Amiri" pitchFamily="2" charset="-78"/>
                 <a:cs typeface="Amiri" pitchFamily="2" charset="-78"/>
               </a:rPr>
               <a:t>مَا هِوَايَاتُكَ؟</a:t>
@@ -4777,6 +4821,7 @@
                   <a:srgbClr val="1B3B6F"/>
                 </a:solidFill>
                 <a:latin typeface="Amiri" pitchFamily="2" charset="-78"/>
+                <a:ea typeface="Amiri" pitchFamily="2" charset="-78"/>
                 <a:cs typeface="Amiri" pitchFamily="2" charset="-78"/>
               </a:rPr>
               <a:t>نَعَمْ، فِي … كُنْتُ … فَتَعَلَّمْتُ …</a:t>
@@ -4853,6 +4898,7 @@
                   <a:srgbClr val="1B3B6F"/>
                 </a:solidFill>
                 <a:latin typeface="Amiri" pitchFamily="2" charset="-78"/>
+                <a:ea typeface="Amiri" pitchFamily="2" charset="-78"/>
                 <a:cs typeface="Amiri" pitchFamily="2" charset="-78"/>
               </a:rPr>
               <a:t>هَلْ عِنْدَكَ خِبْرَةٌ مَعَ الأَطْفَالِ؟</a:t>
@@ -4956,6 +5002,7 @@
                   <a:srgbClr val="1B3B6F"/>
                 </a:solidFill>
                 <a:latin typeface="Amiri" pitchFamily="2" charset="-78"/>
+                <a:ea typeface="Amiri" pitchFamily="2" charset="-78"/>
                 <a:cs typeface="Amiri" pitchFamily="2" charset="-78"/>
               </a:rPr>
               <a:t>أَسْتَطِيعُ … ، أَمَّا أَيَّامُ الأُسْبُوعِ فَمَشْغُولَةٌ …</a:t>
@@ -5032,6 +5079,7 @@
                   <a:srgbClr val="1B3B6F"/>
                 </a:solidFill>
                 <a:latin typeface="Amiri" pitchFamily="2" charset="-78"/>
+                <a:ea typeface="Amiri" pitchFamily="2" charset="-78"/>
                 <a:cs typeface="Amiri" pitchFamily="2" charset="-78"/>
               </a:rPr>
               <a:t>مَتَى تَسْتَطِيعُ أَنْ تَأْتِيَ؟</a:t>
@@ -5135,6 +5183,7 @@
                   <a:srgbClr val="1B3B6F"/>
                 </a:solidFill>
                 <a:latin typeface="Amiri" pitchFamily="2" charset="-78"/>
+                <a:ea typeface="Amiri" pitchFamily="2" charset="-78"/>
                 <a:cs typeface="Amiri" pitchFamily="2" charset="-78"/>
               </a:rPr>
               <a:t>لِأَنَّ … ؛ وَسَتُفِيدُنِي …</a:t>
@@ -5211,6 +5260,7 @@
                   <a:srgbClr val="1B3B6F"/>
                 </a:solidFill>
                 <a:latin typeface="Amiri" pitchFamily="2" charset="-78"/>
+                <a:ea typeface="Amiri" pitchFamily="2" charset="-78"/>
                 <a:cs typeface="Amiri" pitchFamily="2" charset="-78"/>
               </a:rPr>
               <a:t>وَلِمَاذَا تُرِيدُ أَنْ تَتَطَوَّعَ؟</a:t>
@@ -5420,6 +5470,7 @@
                   <a:srgbClr val="D4AF37"/>
                 </a:solidFill>
                 <a:latin typeface="Amiri" pitchFamily="2" charset="-78"/>
+                <a:ea typeface="Amiri" pitchFamily="2" charset="-78"/>
                 <a:cs typeface="Amiri" pitchFamily="2" charset="-78"/>
               </a:rPr>
               <a:t>م</a:t>
@@ -5740,6 +5791,7 @@
                   <a:srgbClr val="8A6D1E"/>
                 </a:solidFill>
                 <a:latin typeface="Amiri" pitchFamily="2" charset="-78"/>
+                <a:ea typeface="Amiri" pitchFamily="2" charset="-78"/>
                 <a:cs typeface="Amiri" pitchFamily="2" charset="-78"/>
               </a:rPr>
               <a:t>السِّيَاحَةُ: نِعْمَةٌ أَمْ عِبْءٌ؟</a:t>
@@ -6020,6 +6072,7 @@
                   <a:srgbClr val="1B3B6F"/>
                 </a:solidFill>
                 <a:latin typeface="Amiri" pitchFamily="2" charset="-78"/>
+                <a:ea typeface="Amiri" pitchFamily="2" charset="-78"/>
                 <a:cs typeface="Amiri" pitchFamily="2" charset="-78"/>
               </a:rPr>
               <a:t>مِنْ نَاحِيَةٍ … وَمِنْ نَاحِيَةٍ أُخْرَى …</a:t>
@@ -6096,6 +6149,7 @@
                   <a:srgbClr val="1B3B6F"/>
                 </a:solidFill>
                 <a:latin typeface="Amiri" pitchFamily="2" charset="-78"/>
+                <a:ea typeface="Amiri" pitchFamily="2" charset="-78"/>
                 <a:cs typeface="Amiri" pitchFamily="2" charset="-78"/>
               </a:rPr>
               <a:t>هَلْ تُفِيدُ السِّيَاحَةُ السُّكَّانَ المَحَلِّيِّينَ؟</a:t>
@@ -6199,6 +6253,7 @@
                   <a:srgbClr val="1B3B6F"/>
                 </a:solidFill>
                 <a:latin typeface="Amiri" pitchFamily="2" charset="-78"/>
+                <a:ea typeface="Amiri" pitchFamily="2" charset="-78"/>
                 <a:cs typeface="Amiri" pitchFamily="2" charset="-78"/>
               </a:rPr>
               <a:t>عِنْدَمَا زُرْتُ … ، رَأَيْتُ … ؛ وَقِيلَ لِي إِنَّ …</a:t>
@@ -6275,6 +6330,7 @@
                   <a:srgbClr val="1B3B6F"/>
                 </a:solidFill>
                 <a:latin typeface="Amiri" pitchFamily="2" charset="-78"/>
+                <a:ea typeface="Amiri" pitchFamily="2" charset="-78"/>
                 <a:cs typeface="Amiri" pitchFamily="2" charset="-78"/>
               </a:rPr>
               <a:t>أَعْطِنَا مِثَالًا.</a:t>
@@ -6378,6 +6434,7 @@
                   <a:srgbClr val="1B3B6F"/>
                 </a:solidFill>
                 <a:latin typeface="Amiri" pitchFamily="2" charset="-78"/>
+                <a:ea typeface="Amiri" pitchFamily="2" charset="-78"/>
                 <a:cs typeface="Amiri" pitchFamily="2" charset="-78"/>
               </a:rPr>
               <a:t>بِسَبَبِ … ، مِمَّا … ؛ لِذٰلِكَ يَجِبُ …</a:t>
@@ -6454,6 +6511,7 @@
                   <a:srgbClr val="1B3B6F"/>
                 </a:solidFill>
                 <a:latin typeface="Amiri" pitchFamily="2" charset="-78"/>
+                <a:ea typeface="Amiri" pitchFamily="2" charset="-78"/>
                 <a:cs typeface="Amiri" pitchFamily="2" charset="-78"/>
               </a:rPr>
               <a:t>وَمَاذَا عَنِ البِيئَةِ؟</a:t>
@@ -6557,6 +6615,7 @@
                   <a:srgbClr val="1B3B6F"/>
                 </a:solidFill>
                 <a:latin typeface="Amiri" pitchFamily="2" charset="-78"/>
+                <a:ea typeface="Amiri" pitchFamily="2" charset="-78"/>
                 <a:cs typeface="Amiri" pitchFamily="2" charset="-78"/>
               </a:rPr>
               <a:t>صَحِيحٌ أَنَّ … غَيْرَ أَنَّ ذٰلِكَ يَحْدُثُ فَقَطْ إِذَا …</a:t>
@@ -6633,6 +6692,7 @@
                   <a:srgbClr val="1B3B6F"/>
                 </a:solidFill>
                 <a:latin typeface="Amiri" pitchFamily="2" charset="-78"/>
+                <a:ea typeface="Amiri" pitchFamily="2" charset="-78"/>
                 <a:cs typeface="Amiri" pitchFamily="2" charset="-78"/>
               </a:rPr>
               <a:t>لٰكِنَّ السِّيَاحَةَ تُقَرِّبُ الثَّقَافَاتِ.</a:t>
@@ -6736,6 +6796,7 @@
                   <a:srgbClr val="1B3B6F"/>
                 </a:solidFill>
                 <a:latin typeface="Amiri" pitchFamily="2" charset="-78"/>
+                <a:ea typeface="Amiri" pitchFamily="2" charset="-78"/>
                 <a:cs typeface="Amiri" pitchFamily="2" charset="-78"/>
               </a:rPr>
               <a:t>لَوْ كُنْتُ …، لَشَجَّعْتُ …</a:t>
@@ -6812,6 +6873,7 @@
                   <a:srgbClr val="1B3B6F"/>
                 </a:solidFill>
                 <a:latin typeface="Amiri" pitchFamily="2" charset="-78"/>
+                <a:ea typeface="Amiri" pitchFamily="2" charset="-78"/>
                 <a:cs typeface="Amiri" pitchFamily="2" charset="-78"/>
               </a:rPr>
               <a:t>لَوْ كُنْتَ وَزِيرَ السِّيَاحَةِ، مَاذَا تَفْعَلُ؟</a:t>
@@ -7021,6 +7083,7 @@
                   <a:srgbClr val="D4AF37"/>
                 </a:solidFill>
                 <a:latin typeface="Amiri" pitchFamily="2" charset="-78"/>
+                <a:ea typeface="Amiri" pitchFamily="2" charset="-78"/>
                 <a:cs typeface="Amiri" pitchFamily="2" charset="-78"/>
               </a:rPr>
               <a:t>م</a:t>
@@ -7341,6 +7404,7 @@
                   <a:srgbClr val="8A6D1E"/>
                 </a:solidFill>
                 <a:latin typeface="Amiri" pitchFamily="2" charset="-78"/>
+                <a:ea typeface="Amiri" pitchFamily="2" charset="-78"/>
                 <a:cs typeface="Amiri" pitchFamily="2" charset="-78"/>
               </a:rPr>
               <a:t>وَرَقَةُ المُلَاحِظِ</a:t>
@@ -8811,6 +8875,7 @@
                   <a:srgbClr val="D4AF37"/>
                 </a:solidFill>
                 <a:latin typeface="Amiri" pitchFamily="2" charset="-78"/>
+                <a:ea typeface="Amiri" pitchFamily="2" charset="-78"/>
                 <a:cs typeface="Amiri" pitchFamily="2" charset="-78"/>
               </a:rPr>
               <a:t>م</a:t>
@@ -9131,6 +9196,7 @@
                   <a:srgbClr val="8A6D1E"/>
                 </a:solidFill>
                 <a:latin typeface="Amiri" pitchFamily="2" charset="-78"/>
+                <a:ea typeface="Amiri" pitchFamily="2" charset="-78"/>
                 <a:cs typeface="Amiri" pitchFamily="2" charset="-78"/>
               </a:rPr>
               <a:t>نَمُوذَجُ الإِجَابَةِ</a:t>
@@ -9373,6 +9439,7 @@
                   <a:srgbClr val="1B3B6F"/>
                 </a:solidFill>
                 <a:latin typeface="Amiri" pitchFamily="2" charset="-78"/>
+                <a:ea typeface="Amiri" pitchFamily="2" charset="-78"/>
                 <a:cs typeface="Amiri" pitchFamily="2" charset="-78"/>
               </a:rPr>
               <a:t>أُرِيدُ أَنْ أُسَافِرَ إِلَى الإِسْكَنْدَرِيَّةِ.</a:t>
@@ -9449,6 +9516,7 @@
                   <a:srgbClr val="1B3B6F"/>
                 </a:solidFill>
                 <a:latin typeface="Amiri" pitchFamily="2" charset="-78"/>
+                <a:ea typeface="Amiri" pitchFamily="2" charset="-78"/>
                 <a:cs typeface="Amiri" pitchFamily="2" charset="-78"/>
               </a:rPr>
               <a:t>صَبَاحَ الخَيْرِ، إِلَى أَيْنَ؟</a:t>
@@ -9552,6 +9620,7 @@
                   <a:srgbClr val="1B3B6F"/>
                 </a:solidFill>
                 <a:latin typeface="Amiri" pitchFamily="2" charset="-78"/>
+                <a:ea typeface="Amiri" pitchFamily="2" charset="-78"/>
                 <a:cs typeface="Amiri" pitchFamily="2" charset="-78"/>
               </a:rPr>
               <a:t>لَا، تَذْكِرَةُ ذَهَابٍ وَإِيَابٍ، مِنْ فَضْلِكَ.</a:t>
@@ -9628,6 +9697,7 @@
                   <a:srgbClr val="1B3B6F"/>
                 </a:solidFill>
                 <a:latin typeface="Amiri" pitchFamily="2" charset="-78"/>
+                <a:ea typeface="Amiri" pitchFamily="2" charset="-78"/>
                 <a:cs typeface="Amiri" pitchFamily="2" charset="-78"/>
               </a:rPr>
               <a:t>ذَهَابٌ فَقَطْ؟</a:t>
@@ -9731,6 +9801,7 @@
                   <a:srgbClr val="1B3B6F"/>
                 </a:solidFill>
                 <a:latin typeface="Amiri" pitchFamily="2" charset="-78"/>
+                <a:ea typeface="Amiri" pitchFamily="2" charset="-78"/>
                 <a:cs typeface="Amiri" pitchFamily="2" charset="-78"/>
               </a:rPr>
               <a:t>مَتَى يَنْطَلِقُ القِطَارُ؟</a:t>
@@ -9807,6 +9878,7 @@
                   <a:srgbClr val="1B3B6F"/>
                 </a:solidFill>
                 <a:latin typeface="Amiri" pitchFamily="2" charset="-78"/>
+                <a:ea typeface="Amiri" pitchFamily="2" charset="-78"/>
                 <a:cs typeface="Amiri" pitchFamily="2" charset="-78"/>
               </a:rPr>
               <a:t>تَفَضَّلْ. الثَّمَنُ ثَمَانُونَ جُنَيْهًا.</a:t>
@@ -9910,6 +9982,7 @@
                   <a:srgbClr val="1B3B6F"/>
                 </a:solidFill>
                 <a:latin typeface="Amiri" pitchFamily="2" charset="-78"/>
+                <a:ea typeface="Amiri" pitchFamily="2" charset="-78"/>
                 <a:cs typeface="Amiri" pitchFamily="2" charset="-78"/>
               </a:rPr>
               <a:t>مِنْ أَيِّ رَصِيفٍ؟</a:t>
@@ -9986,6 +10059,7 @@
                   <a:srgbClr val="1B3B6F"/>
                 </a:solidFill>
                 <a:latin typeface="Amiri" pitchFamily="2" charset="-78"/>
+                <a:ea typeface="Amiri" pitchFamily="2" charset="-78"/>
                 <a:cs typeface="Amiri" pitchFamily="2" charset="-78"/>
               </a:rPr>
               <a:t>فِي العَاشِرَةِ وَالرُّبْعِ.</a:t>
@@ -10089,6 +10163,7 @@
                   <a:srgbClr val="1B3B6F"/>
                 </a:solidFill>
                 <a:latin typeface="Amiri" pitchFamily="2" charset="-78"/>
+                <a:ea typeface="Amiri" pitchFamily="2" charset="-78"/>
                 <a:cs typeface="Amiri" pitchFamily="2" charset="-78"/>
               </a:rPr>
               <a:t>لِأَنِّي أُرِيدُ أَنْ أَزُورَ عَمِّي وَأَرَى البَحْرَ.</a:t>
@@ -10165,6 +10240,7 @@
                   <a:srgbClr val="1B3B6F"/>
                 </a:solidFill>
                 <a:latin typeface="Amiri" pitchFamily="2" charset="-78"/>
+                <a:ea typeface="Amiri" pitchFamily="2" charset="-78"/>
                 <a:cs typeface="Amiri" pitchFamily="2" charset="-78"/>
               </a:rPr>
               <a:t>الرَّصِيفُ الثَّالِثُ. لِمَاذَا تُسَافِرُ إِلَى الإِسْكَنْدَرِيَّةِ؟</a:t>
@@ -10374,6 +10450,7 @@
                   <a:srgbClr val="D4AF37"/>
                 </a:solidFill>
                 <a:latin typeface="Amiri" pitchFamily="2" charset="-78"/>
+                <a:ea typeface="Amiri" pitchFamily="2" charset="-78"/>
                 <a:cs typeface="Amiri" pitchFamily="2" charset="-78"/>
               </a:rPr>
               <a:t>م</a:t>
@@ -10694,6 +10771,7 @@
                   <a:srgbClr val="8A6D1E"/>
                 </a:solidFill>
                 <a:latin typeface="Amiri" pitchFamily="2" charset="-78"/>
+                <a:ea typeface="Amiri" pitchFamily="2" charset="-78"/>
                 <a:cs typeface="Amiri" pitchFamily="2" charset="-78"/>
               </a:rPr>
               <a:t>نَمُوذَجُ الإِجَابَةِ</a:t>
@@ -10936,6 +11014,7 @@
                   <a:srgbClr val="1B3B6F"/>
                 </a:solidFill>
                 <a:latin typeface="Amiri" pitchFamily="2" charset="-78"/>
+                <a:ea typeface="Amiri" pitchFamily="2" charset="-78"/>
                 <a:cs typeface="Amiri" pitchFamily="2" charset="-78"/>
               </a:rPr>
               <a:t>فَقَدْتُ حَقِيبَتِي فِي صَالَةِ الوُصُولِ.</a:t>
@@ -11012,6 +11091,7 @@
                   <a:srgbClr val="1B3B6F"/>
                 </a:solidFill>
                 <a:latin typeface="Amiri" pitchFamily="2" charset="-78"/>
+                <a:ea typeface="Amiri" pitchFamily="2" charset="-78"/>
                 <a:cs typeface="Amiri" pitchFamily="2" charset="-78"/>
               </a:rPr>
               <a:t>نَعَمْ، كَيْفَ أُسَاعِدُكَ؟</a:t>
@@ -11115,6 +11195,7 @@
                   <a:srgbClr val="1B3B6F"/>
                 </a:solidFill>
                 <a:latin typeface="Amiri" pitchFamily="2" charset="-78"/>
+                <a:ea typeface="Amiri" pitchFamily="2" charset="-78"/>
                 <a:cs typeface="Amiri" pitchFamily="2" charset="-78"/>
               </a:rPr>
               <a:t>هِيَ حَقِيبَةٌ سَوْدَاءُ صَغِيرَةٌ مِنَ الجِلْدِ.</a:t>
@@ -11191,6 +11272,7 @@
                   <a:srgbClr val="1B3B6F"/>
                 </a:solidFill>
                 <a:latin typeface="Amiri" pitchFamily="2" charset="-78"/>
+                <a:ea typeface="Amiri" pitchFamily="2" charset="-78"/>
                 <a:cs typeface="Amiri" pitchFamily="2" charset="-78"/>
               </a:rPr>
               <a:t>صِفْ لِي الحَقِيبَةَ.</a:t>
@@ -11294,6 +11376,7 @@
                   <a:srgbClr val="1B3B6F"/>
                 </a:solidFill>
                 <a:latin typeface="Amiri" pitchFamily="2" charset="-78"/>
+                <a:ea typeface="Amiri" pitchFamily="2" charset="-78"/>
                 <a:cs typeface="Amiri" pitchFamily="2" charset="-78"/>
               </a:rPr>
               <a:t>كَانَ فِيهَا جَوَازُ سَفَرِي وَهَاتِفِي وَمِئَةُ دُولَارٍ.</a:t>
@@ -11370,6 +11453,7 @@
                   <a:srgbClr val="1B3B6F"/>
                 </a:solidFill>
                 <a:latin typeface="Amiri" pitchFamily="2" charset="-78"/>
+                <a:ea typeface="Amiri" pitchFamily="2" charset="-78"/>
                 <a:cs typeface="Amiri" pitchFamily="2" charset="-78"/>
               </a:rPr>
               <a:t>مَاذَا كَانَ فِيهَا؟</a:t>
@@ -11473,6 +11557,7 @@
                   <a:srgbClr val="1B3B6F"/>
                 </a:solidFill>
                 <a:latin typeface="Amiri" pitchFamily="2" charset="-78"/>
+                <a:ea typeface="Amiri" pitchFamily="2" charset="-78"/>
                 <a:cs typeface="Amiri" pitchFamily="2" charset="-78"/>
               </a:rPr>
               <a:t>مَتَى سَتُخْبِرُونَنِي؟ وَهَلْ أَسْتَطِيعُ أَنْ أَتْرُكَ رَقْمَ هَاتِفِ صَدِيقِي؟</a:t>
@@ -11549,6 +11634,7 @@
                   <a:srgbClr val="1B3B6F"/>
                 </a:solidFill>
                 <a:latin typeface="Amiri" pitchFamily="2" charset="-78"/>
+                <a:ea typeface="Amiri" pitchFamily="2" charset="-78"/>
                 <a:cs typeface="Amiri" pitchFamily="2" charset="-78"/>
               </a:rPr>
               <a:t>سَنَبْحَثُ عَنْهَا.</a:t>
@@ -11652,6 +11738,7 @@
                   <a:srgbClr val="1B3B6F"/>
                 </a:solidFill>
                 <a:latin typeface="Amiri" pitchFamily="2" charset="-78"/>
+                <a:ea typeface="Amiri" pitchFamily="2" charset="-78"/>
                 <a:cs typeface="Amiri" pitchFamily="2" charset="-78"/>
               </a:rPr>
               <a:t>سَأُقِيمُ فِي فُنْدُقِ النِّيلِ، قُرْبَ المُتْحَفِ المِصْرِيِّ، لِمُدَّةِ أُسْبُوعٍ.</a:t>
@@ -11728,6 +11815,7 @@
                   <a:srgbClr val="1B3B6F"/>
                 </a:solidFill>
                 <a:latin typeface="Amiri" pitchFamily="2" charset="-78"/>
+                <a:ea typeface="Amiri" pitchFamily="2" charset="-78"/>
                 <a:cs typeface="Amiri" pitchFamily="2" charset="-78"/>
               </a:rPr>
               <a:t>طَبْعًا. أَيْنَ سَتُقِيمُ فِي القَاهِرَةِ؟</a:t>
@@ -11937,6 +12025,7 @@
                   <a:srgbClr val="D4AF37"/>
                 </a:solidFill>
                 <a:latin typeface="Amiri" pitchFamily="2" charset="-78"/>
+                <a:ea typeface="Amiri" pitchFamily="2" charset="-78"/>
                 <a:cs typeface="Amiri" pitchFamily="2" charset="-78"/>
               </a:rPr>
               <a:t>م</a:t>
@@ -12257,6 +12346,7 @@
                   <a:srgbClr val="8A6D1E"/>
                 </a:solidFill>
                 <a:latin typeface="Amiri" pitchFamily="2" charset="-78"/>
+                <a:ea typeface="Amiri" pitchFamily="2" charset="-78"/>
                 <a:cs typeface="Amiri" pitchFamily="2" charset="-78"/>
               </a:rPr>
               <a:t>نَمُوذَجُ الإِجَابَةِ</a:t>
@@ -12499,6 +12589,7 @@
                   <a:srgbClr val="1B3B6F"/>
                 </a:solidFill>
                 <a:latin typeface="Amiri" pitchFamily="2" charset="-78"/>
+                <a:ea typeface="Amiri" pitchFamily="2" charset="-78"/>
                 <a:cs typeface="Amiri" pitchFamily="2" charset="-78"/>
               </a:rPr>
               <a:t>أَنَا صَبُورٌ وَنَشِيطٌ وَمُنَظَّمٌ؛ مَثَلًا، أُسَاعِدُ أَخِي الصَّغِيرَ فِي وَاجِبَاتِهِ كُلَّ يَوْمٍ دُونَ أَنْ أَغْضَبَ.</a:t>
@@ -12575,6 +12666,7 @@
                   <a:srgbClr val="1B3B6F"/>
                 </a:solidFill>
                 <a:latin typeface="Amiri" pitchFamily="2" charset="-78"/>
+                <a:ea typeface="Amiri" pitchFamily="2" charset="-78"/>
                 <a:cs typeface="Amiri" pitchFamily="2" charset="-78"/>
               </a:rPr>
               <a:t>صِفْ نَفْسَكَ بِثَلَاثِ صِفَاتٍ.</a:t>
@@ -12678,6 +12770,7 @@
                   <a:srgbClr val="1B3B6F"/>
                 </a:solidFill>
                 <a:latin typeface="Amiri" pitchFamily="2" charset="-78"/>
+                <a:ea typeface="Amiri" pitchFamily="2" charset="-78"/>
                 <a:cs typeface="Amiri" pitchFamily="2" charset="-78"/>
               </a:rPr>
               <a:t>أَلْعَبُ كُرَةَ القَدَمِ مَرَّتَيْنِ فِي الأُسْبُوعِ، وَأَرْسُمُ فِي نِهَايَةِ الأُسْبُوعِ، لِأَنَّ الرَّسْمَ يُرِيحُنِي.</a:t>
@@ -12754,6 +12847,7 @@
                   <a:srgbClr val="1B3B6F"/>
                 </a:solidFill>
                 <a:latin typeface="Amiri" pitchFamily="2" charset="-78"/>
+                <a:ea typeface="Amiri" pitchFamily="2" charset="-78"/>
                 <a:cs typeface="Amiri" pitchFamily="2" charset="-78"/>
               </a:rPr>
               <a:t>مَا هِوَايَاتُكَ؟</a:t>
@@ -12857,6 +12951,7 @@
                   <a:srgbClr val="1B3B6F"/>
                 </a:solidFill>
                 <a:latin typeface="Amiri" pitchFamily="2" charset="-78"/>
+                <a:ea typeface="Amiri" pitchFamily="2" charset="-78"/>
                 <a:cs typeface="Amiri" pitchFamily="2" charset="-78"/>
               </a:rPr>
               <a:t>نَعَمْ، فِي الصَّيْفِ المَاضِي كُنْتُ أُسَاعِدُ فِي مُخَيَّمٍ رِيَاضِيٍّ لِلْأَطْفَالِ، فَتَعَلَّمْتُ كَيْفَ أَشْرَحُ القَوَاعِدَ بِطَرِيقَةٍ بَسِيطَةٍ.</a:t>
@@ -12933,6 +13028,7 @@
                   <a:srgbClr val="1B3B6F"/>
                 </a:solidFill>
                 <a:latin typeface="Amiri" pitchFamily="2" charset="-78"/>
+                <a:ea typeface="Amiri" pitchFamily="2" charset="-78"/>
                 <a:cs typeface="Amiri" pitchFamily="2" charset="-78"/>
               </a:rPr>
               <a:t>هَلْ عِنْدَكَ خِبْرَةٌ مَعَ الأَطْفَالِ؟</a:t>
@@ -13036,6 +13132,7 @@
                   <a:srgbClr val="1B3B6F"/>
                 </a:solidFill>
                 <a:latin typeface="Amiri" pitchFamily="2" charset="-78"/>
+                <a:ea typeface="Amiri" pitchFamily="2" charset="-78"/>
                 <a:cs typeface="Amiri" pitchFamily="2" charset="-78"/>
               </a:rPr>
               <a:t>أَسْتَطِيعُ أَنْ آتِيَ يَوْمَ السَّبْتِ صَبَاحًا، أَمَّا أَيَّامُ الأُسْبُوعِ فَمَشْغُولَةٌ بِالمُرَاجَعَةِ لِلِامْتِحَانَاتِ.</a:t>
@@ -13112,6 +13209,7 @@
                   <a:srgbClr val="1B3B6F"/>
                 </a:solidFill>
                 <a:latin typeface="Amiri" pitchFamily="2" charset="-78"/>
+                <a:ea typeface="Amiri" pitchFamily="2" charset="-78"/>
                 <a:cs typeface="Amiri" pitchFamily="2" charset="-78"/>
               </a:rPr>
               <a:t>مَتَى تَسْتَطِيعُ أَنْ تَأْتِيَ؟</a:t>
@@ -13215,6 +13313,7 @@
                   <a:srgbClr val="1B3B6F"/>
                 </a:solidFill>
                 <a:latin typeface="Amiri" pitchFamily="2" charset="-78"/>
+                <a:ea typeface="Amiri" pitchFamily="2" charset="-78"/>
                 <a:cs typeface="Amiri" pitchFamily="2" charset="-78"/>
               </a:rPr>
               <a:t>لِأَنَّ هٰذَا النَّادِيَ سَاعَدَنِي عِنْدَمَا كُنْتُ صَغِيرًا؛ وَسَتُفِيدُنِي الخِبْرَةُ لِأَنِّي أَطْمَحُ إِلَى أَنْ أَكُونَ مُعَلِّمًا.</a:t>
@@ -13291,6 +13390,7 @@
                   <a:srgbClr val="1B3B6F"/>
                 </a:solidFill>
                 <a:latin typeface="Amiri" pitchFamily="2" charset="-78"/>
+                <a:ea typeface="Amiri" pitchFamily="2" charset="-78"/>
                 <a:cs typeface="Amiri" pitchFamily="2" charset="-78"/>
               </a:rPr>
               <a:t>وَلِمَاذَا تُرِيدُ أَنْ تَتَطَوَّعَ؟</a:t>
@@ -13500,6 +13600,7 @@
                   <a:srgbClr val="D4AF37"/>
                 </a:solidFill>
                 <a:latin typeface="Amiri" pitchFamily="2" charset="-78"/>
+                <a:ea typeface="Amiri" pitchFamily="2" charset="-78"/>
                 <a:cs typeface="Amiri" pitchFamily="2" charset="-78"/>
               </a:rPr>
               <a:t>م</a:t>
@@ -13820,6 +13921,7 @@
                   <a:srgbClr val="8A6D1E"/>
                 </a:solidFill>
                 <a:latin typeface="Amiri" pitchFamily="2" charset="-78"/>
+                <a:ea typeface="Amiri" pitchFamily="2" charset="-78"/>
                 <a:cs typeface="Amiri" pitchFamily="2" charset="-78"/>
               </a:rPr>
               <a:t>نَمُوذَجُ الإِجَابَةِ</a:t>
@@ -14062,6 +14164,7 @@
                   <a:srgbClr val="1B3B6F"/>
                 </a:solidFill>
                 <a:latin typeface="Amiri" pitchFamily="2" charset="-78"/>
+                <a:ea typeface="Amiri" pitchFamily="2" charset="-78"/>
                 <a:cs typeface="Amiri" pitchFamily="2" charset="-78"/>
               </a:rPr>
               <a:t>مِنْ نَاحِيَةٍ، تُوَفِّرُ السِّيَاحَةُ فُرَصَ عَمَلٍ وَتُنْعِشُ الأَسْوَاقَ، وَمِنْ نَاحِيَةٍ أُخْرَى، تَرْفَعُ أَسْعَارَ البُيُوتِ، مِمَّا يَدْفَعُ بَعْضَ السُّكَّانِ إِلَى الرَّحِيلِ.</a:t>
@@ -14138,6 +14241,7 @@
                   <a:srgbClr val="1B3B6F"/>
                 </a:solidFill>
                 <a:latin typeface="Amiri" pitchFamily="2" charset="-78"/>
+                <a:ea typeface="Amiri" pitchFamily="2" charset="-78"/>
                 <a:cs typeface="Amiri" pitchFamily="2" charset="-78"/>
               </a:rPr>
               <a:t>هَلْ تُفِيدُ السِّيَاحَةُ السُّكَّانَ المَحَلِّيِّينَ؟</a:t>
@@ -14244,6 +14348,7 @@
                   <a:srgbClr val="1B3B6F"/>
                 </a:solidFill>
                 <a:latin typeface="Amiri" pitchFamily="2" charset="-78"/>
+                <a:ea typeface="Amiri" pitchFamily="2" charset="-78"/>
                 <a:cs typeface="Amiri" pitchFamily="2" charset="-78"/>
               </a:rPr>
               <a:t>عِنْدَمَا زُرْتُ مَدِينَةً قَدِيمَةً فِي المَغْرِبِ، رَأَيْتُ بُيُوتًا تَقْلِيدِيَّةً تَحَوَّلَتْ إِلَى فَنَادِقَ، وَقِيلَ لِي إِنَّ أَصْحَابَهَا انْتَقَلُوا إِلَى خَارِجِ المَدِينَةِ.</a:t>
@@ -14320,6 +14425,7 @@
                   <a:srgbClr val="1B3B6F"/>
                 </a:solidFill>
                 <a:latin typeface="Amiri" pitchFamily="2" charset="-78"/>
+                <a:ea typeface="Amiri" pitchFamily="2" charset="-78"/>
                 <a:cs typeface="Amiri" pitchFamily="2" charset="-78"/>
               </a:rPr>
               <a:t>أَعْطِنَا مِثَالًا.</a:t>
@@ -14426,6 +14532,7 @@
                   <a:srgbClr val="1B3B6F"/>
                 </a:solidFill>
                 <a:latin typeface="Amiri" pitchFamily="2" charset="-78"/>
+                <a:ea typeface="Amiri" pitchFamily="2" charset="-78"/>
                 <a:cs typeface="Amiri" pitchFamily="2" charset="-78"/>
               </a:rPr>
               <a:t>بِسَبَبِ كَثْرَةِ الطَّائِرَاتِ وَالنُّفَايَاتِ، تَتَضَرَّرُ الشَّوَاطِئُ، مِمَّا يُهَدِّدُ الحَيَاةَ البَحْرِيَّةَ؛ لِذٰلِكَ يَجِبُ أَنْ تُفْرَضَ ضَرِيبَةٌ صَغِيرَةٌ عَلَى السُّيَّاحِ لِحِمَايَتِهَا.</a:t>
@@ -14502,6 +14609,7 @@
                   <a:srgbClr val="1B3B6F"/>
                 </a:solidFill>
                 <a:latin typeface="Amiri" pitchFamily="2" charset="-78"/>
+                <a:ea typeface="Amiri" pitchFamily="2" charset="-78"/>
                 <a:cs typeface="Amiri" pitchFamily="2" charset="-78"/>
               </a:rPr>
               <a:t>وَمَاذَا عَنِ البِيئَةِ؟</a:t>
@@ -14605,6 +14713,7 @@
                   <a:srgbClr val="1B3B6F"/>
                 </a:solidFill>
                 <a:latin typeface="Amiri" pitchFamily="2" charset="-78"/>
+                <a:ea typeface="Amiri" pitchFamily="2" charset="-78"/>
                 <a:cs typeface="Amiri" pitchFamily="2" charset="-78"/>
               </a:rPr>
               <a:t>صَحِيحٌ أَنَّهَا قَدْ تُقَرِّبُهَا، غَيْرَ أَنَّ ذٰلِكَ يَحْدُثُ فَقَطْ إِذَا احْتَرَمَ السَّائِحُ عَادَاتِ البَلَدِ، وَتَعَلَّمَ بَعْضَ كَلِمَاتِ لُغَتِهِ، وَاشْتَرَى مِنْ أَهْلِهِ.</a:t>
@@ -14681,6 +14790,7 @@
                   <a:srgbClr val="1B3B6F"/>
                 </a:solidFill>
                 <a:latin typeface="Amiri" pitchFamily="2" charset="-78"/>
+                <a:ea typeface="Amiri" pitchFamily="2" charset="-78"/>
                 <a:cs typeface="Amiri" pitchFamily="2" charset="-78"/>
               </a:rPr>
               <a:t>لٰكِنَّ السِّيَاحَةَ تُقَرِّبُ الثَّقَافَاتِ.</a:t>
@@ -14784,6 +14894,7 @@
                   <a:srgbClr val="1B3B6F"/>
                 </a:solidFill>
                 <a:latin typeface="Amiri" pitchFamily="2" charset="-78"/>
+                <a:ea typeface="Amiri" pitchFamily="2" charset="-78"/>
                 <a:cs typeface="Amiri" pitchFamily="2" charset="-78"/>
               </a:rPr>
               <a:t>لَوْ كُنْتُ وَزِيرَ السِّيَاحَةِ، لَشَجَّعْتُ السِّيَاحَةَ فِي القُرَى الصَّغِيرَةِ، وَلَجَعَلْتُ جُزْءًا مِنَ الأَرْبَاحِ لِمَدَارِسِ السُّكَّانِ المَحَلِّيِّينَ.</a:t>
@@ -14860,6 +14971,7 @@
                   <a:srgbClr val="1B3B6F"/>
                 </a:solidFill>
                 <a:latin typeface="Amiri" pitchFamily="2" charset="-78"/>
+                <a:ea typeface="Amiri" pitchFamily="2" charset="-78"/>
                 <a:cs typeface="Amiri" pitchFamily="2" charset="-78"/>
               </a:rPr>
               <a:t>لَوْ كُنْتَ وَزِيرَ السِّيَاحَةِ، مَاذَا تَفْعَلُ؟</a:t>
@@ -15069,6 +15181,7 @@
                   <a:srgbClr val="D4AF37"/>
                 </a:solidFill>
                 <a:latin typeface="Amiri" pitchFamily="2" charset="-78"/>
+                <a:ea typeface="Amiri" pitchFamily="2" charset="-78"/>
                 <a:cs typeface="Amiri" pitchFamily="2" charset="-78"/>
               </a:rPr>
               <a:t>م</a:t>
@@ -15389,6 +15502,7 @@
                   <a:srgbClr val="8A6D1E"/>
                 </a:solidFill>
                 <a:latin typeface="Amiri" pitchFamily="2" charset="-78"/>
+                <a:ea typeface="Amiri" pitchFamily="2" charset="-78"/>
                 <a:cs typeface="Amiri" pitchFamily="2" charset="-78"/>
               </a:rPr>
               <a:t>أَسْئِلَةٌ مِنْ كُلِّ المَحَاوِرِ</a:t>
@@ -15669,6 +15783,7 @@
                   <a:srgbClr val="1B3B6F"/>
                 </a:solidFill>
                 <a:latin typeface="Amiri" pitchFamily="2" charset="-78"/>
+                <a:ea typeface="Amiri" pitchFamily="2" charset="-78"/>
                 <a:cs typeface="Amiri" pitchFamily="2" charset="-78"/>
               </a:rPr>
               <a:t>آكُلُ …</a:t>
@@ -15745,6 +15860,7 @@
                   <a:srgbClr val="5A6472"/>
                 </a:solidFill>
                 <a:latin typeface="Amiri" pitchFamily="2" charset="-78"/>
+                <a:ea typeface="Amiri" pitchFamily="2" charset="-78"/>
                 <a:cs typeface="Amiri" pitchFamily="2" charset="-78"/>
               </a:rPr>
               <a:t>مَاذَا تَأْكُلُ فِي الفُطُورِ؟</a:t>
@@ -15926,6 +16042,7 @@
                   <a:srgbClr val="1B3B6F"/>
                 </a:solidFill>
                 <a:latin typeface="Amiri" pitchFamily="2" charset="-78"/>
+                <a:ea typeface="Amiri" pitchFamily="2" charset="-78"/>
                 <a:cs typeface="Amiri" pitchFamily="2" charset="-78"/>
               </a:rPr>
               <a:t>أَعَزُّ أَصْدِقَائِي … ؛ هُوَ …</a:t>
@@ -16002,6 +16119,7 @@
                   <a:srgbClr val="5A6472"/>
                 </a:solidFill>
                 <a:latin typeface="Amiri" pitchFamily="2" charset="-78"/>
+                <a:ea typeface="Amiri" pitchFamily="2" charset="-78"/>
                 <a:cs typeface="Amiri" pitchFamily="2" charset="-78"/>
               </a:rPr>
               <a:t>صِفْ أَعَزَّ أَصْدِقَائِكَ</a:t>
@@ -16183,6 +16301,7 @@
                   <a:srgbClr val="1B3B6F"/>
                 </a:solidFill>
                 <a:latin typeface="Amiri" pitchFamily="2" charset="-78"/>
+                <a:ea typeface="Amiri" pitchFamily="2" charset="-78"/>
                 <a:cs typeface="Amiri" pitchFamily="2" charset="-78"/>
               </a:rPr>
               <a:t>الطَّقْسُ …</a:t>
@@ -16259,6 +16378,7 @@
                   <a:srgbClr val="5A6472"/>
                 </a:solidFill>
                 <a:latin typeface="Amiri" pitchFamily="2" charset="-78"/>
+                <a:ea typeface="Amiri" pitchFamily="2" charset="-78"/>
                 <a:cs typeface="Amiri" pitchFamily="2" charset="-78"/>
               </a:rPr>
               <a:t>كَيْفَ الطَّقْسُ الآنَ؟</a:t>
@@ -16440,6 +16560,7 @@
                   <a:srgbClr val="1B3B6F"/>
                 </a:solidFill>
                 <a:latin typeface="Amiri" pitchFamily="2" charset="-78"/>
+                <a:ea typeface="Amiri" pitchFamily="2" charset="-78"/>
                 <a:cs typeface="Amiri" pitchFamily="2" charset="-78"/>
               </a:rPr>
               <a:t>أُرِيدُ أَنْ أَكُونَ …</a:t>
@@ -16516,6 +16637,7 @@
                   <a:srgbClr val="5A6472"/>
                 </a:solidFill>
                 <a:latin typeface="Amiri" pitchFamily="2" charset="-78"/>
+                <a:ea typeface="Amiri" pitchFamily="2" charset="-78"/>
                 <a:cs typeface="Amiri" pitchFamily="2" charset="-78"/>
               </a:rPr>
               <a:t>مَا الوَظِيفَةُ الَّتِي تُرِيدُهَا؟</a:t>
@@ -16697,6 +16819,7 @@
                   <a:srgbClr val="1B3B6F"/>
                 </a:solidFill>
                 <a:latin typeface="Amiri" pitchFamily="2" charset="-78"/>
+                <a:ea typeface="Amiri" pitchFamily="2" charset="-78"/>
                 <a:cs typeface="Amiri" pitchFamily="2" charset="-78"/>
               </a:rPr>
               <a:t>أُرِيدُ أَنْ أَزُورَ … لِأَنَّ …</a:t>
@@ -16773,6 +16896,7 @@
                   <a:srgbClr val="5A6472"/>
                 </a:solidFill>
                 <a:latin typeface="Amiri" pitchFamily="2" charset="-78"/>
+                <a:ea typeface="Amiri" pitchFamily="2" charset="-78"/>
                 <a:cs typeface="Amiri" pitchFamily="2" charset="-78"/>
               </a:rPr>
               <a:t>أَيُّ بَلَدٍ تُرِيدُ أَنْ تَزُورَ؟</a:t>
@@ -16940,6 +17064,7 @@
                   <a:srgbClr val="1B3B6F"/>
                 </a:solidFill>
                 <a:latin typeface="Amiri" pitchFamily="2" charset="-78"/>
+                <a:ea typeface="Amiri" pitchFamily="2" charset="-78"/>
                 <a:cs typeface="Amiri" pitchFamily="2" charset="-78"/>
               </a:rPr>
               <a:t>عَفْوًا، هَلْ يُمْكِنُ أَنْ تُعِيدَ السُّؤَالَ؟</a:t>
@@ -17073,6 +17198,7 @@
                   <a:srgbClr val="D4AF37"/>
                 </a:solidFill>
                 <a:latin typeface="Amiri" pitchFamily="2" charset="-78"/>
+                <a:ea typeface="Amiri" pitchFamily="2" charset="-78"/>
                 <a:cs typeface="Amiri" pitchFamily="2" charset="-78"/>
               </a:rPr>
               <a:t>م</a:t>
@@ -17393,6 +17519,7 @@
                   <a:srgbClr val="8A6D1E"/>
                 </a:solidFill>
                 <a:latin typeface="Amiri" pitchFamily="2" charset="-78"/>
+                <a:ea typeface="Amiri" pitchFamily="2" charset="-78"/>
                 <a:cs typeface="Amiri" pitchFamily="2" charset="-78"/>
               </a:rPr>
               <a:t>تَطْوِيرُ الإِجَابَةِ فِي كُلِّ مِحْوَرٍ</a:t>
@@ -17673,6 +17800,7 @@
                   <a:srgbClr val="1B3B6F"/>
                 </a:solidFill>
                 <a:latin typeface="Amiri" pitchFamily="2" charset="-78"/>
+                <a:ea typeface="Amiri" pitchFamily="2" charset="-78"/>
                 <a:cs typeface="Amiri" pitchFamily="2" charset="-78"/>
               </a:rPr>
               <a:t>أَمْشِي … دَائِمًا، وَكُنْتُ … أَمَّا الآنَ فَآكُلُ …</a:t>
@@ -17749,6 +17877,7 @@
                   <a:srgbClr val="5A6472"/>
                 </a:solidFill>
                 <a:latin typeface="Amiri" pitchFamily="2" charset="-78"/>
+                <a:ea typeface="Amiri" pitchFamily="2" charset="-78"/>
                 <a:cs typeface="Amiri" pitchFamily="2" charset="-78"/>
               </a:rPr>
               <a:t>كَيْفَ تُحَافِظُ عَلَى صِحَّتِكَ؟</a:t>
@@ -17865,6 +17994,7 @@
                   <a:srgbClr val="1B3B6F"/>
                 </a:solidFill>
                 <a:latin typeface="Amiri" pitchFamily="2" charset="-78"/>
+                <a:ea typeface="Amiri" pitchFamily="2" charset="-78"/>
                 <a:cs typeface="Amiri" pitchFamily="2" charset="-78"/>
               </a:rPr>
               <a:t>قَضَيْنَا … فِي … ؛ وَكَانَ …</a:t>
@@ -17941,6 +18071,7 @@
                   <a:srgbClr val="5A6472"/>
                 </a:solidFill>
                 <a:latin typeface="Amiri" pitchFamily="2" charset="-78"/>
+                <a:ea typeface="Amiri" pitchFamily="2" charset="-78"/>
                 <a:cs typeface="Amiri" pitchFamily="2" charset="-78"/>
               </a:rPr>
               <a:t>صِفْ عُطْلَةً قَضَيْتَهَا مَعَ عَائِلَتِكَ</a:t>
@@ -18057,6 +18188,7 @@
                   <a:srgbClr val="1B3B6F"/>
                 </a:solidFill>
                 <a:latin typeface="Amiri" pitchFamily="2" charset="-78"/>
+                <a:ea typeface="Amiri" pitchFamily="2" charset="-78"/>
                 <a:cs typeface="Amiri" pitchFamily="2" charset="-78"/>
               </a:rPr>
               <a:t>يَجِبُ أَنْ … لِأَنَّ … مِمَّا …</a:t>
@@ -18133,6 +18265,7 @@
                   <a:srgbClr val="5A6472"/>
                 </a:solidFill>
                 <a:latin typeface="Amiri" pitchFamily="2" charset="-78"/>
+                <a:ea typeface="Amiri" pitchFamily="2" charset="-78"/>
                 <a:cs typeface="Amiri" pitchFamily="2" charset="-78"/>
               </a:rPr>
               <a:t>مَا الَّذِي يَجِبُ أَنْ نَفْعَلَهُ لِحِمَايَةِ البِيئَةِ؟</a:t>
@@ -18249,6 +18382,7 @@
                   <a:srgbClr val="1B3B6F"/>
                 </a:solidFill>
                 <a:latin typeface="Amiri" pitchFamily="2" charset="-78"/>
+                <a:ea typeface="Amiri" pitchFamily="2" charset="-78"/>
                 <a:cs typeface="Amiri" pitchFamily="2" charset="-78"/>
               </a:rPr>
               <a:t>أَوَّلًا … ثُمَّ … وَفِي الأُسْبُوعِ الأَخِيرِ سَأُرَاجِعُ …</a:t>
@@ -18325,6 +18459,7 @@
                   <a:srgbClr val="5A6472"/>
                 </a:solidFill>
                 <a:latin typeface="Amiri" pitchFamily="2" charset="-78"/>
+                <a:ea typeface="Amiri" pitchFamily="2" charset="-78"/>
                 <a:cs typeface="Amiri" pitchFamily="2" charset="-78"/>
               </a:rPr>
               <a:t>كَيْفَ تَسْتَعِدُّ لِلِامْتِحَانَاتِ؟</a:t>
@@ -18441,6 +18576,7 @@
                   <a:srgbClr val="1B3B6F"/>
                 </a:solidFill>
                 <a:latin typeface="Amiri" pitchFamily="2" charset="-78"/>
+                <a:ea typeface="Amiri" pitchFamily="2" charset="-78"/>
                 <a:cs typeface="Amiri" pitchFamily="2" charset="-78"/>
               </a:rPr>
               <a:t>فِي … بَيْنَمَا فِي … ؛ وَكِلْتَاهُمَا …</a:t>
@@ -18517,6 +18653,7 @@
                   <a:srgbClr val="5A6472"/>
                 </a:solidFill>
                 <a:latin typeface="Amiri" pitchFamily="2" charset="-78"/>
+                <a:ea typeface="Amiri" pitchFamily="2" charset="-78"/>
                 <a:cs typeface="Amiri" pitchFamily="2" charset="-78"/>
               </a:rPr>
               <a:t>قَارِنْ بَيْنَ ثَقَافَتَيْنِ تَعْرِفُهُمَا</a:t>
@@ -18739,6 +18876,7 @@
                   <a:srgbClr val="D4AF37"/>
                 </a:solidFill>
                 <a:latin typeface="Amiri" pitchFamily="2" charset="-78"/>
+                <a:ea typeface="Amiri" pitchFamily="2" charset="-78"/>
                 <a:cs typeface="Amiri" pitchFamily="2" charset="-78"/>
               </a:rPr>
               <a:t>م</a:t>
@@ -19059,6 +19197,7 @@
                   <a:srgbClr val="8A6D1E"/>
                 </a:solidFill>
                 <a:latin typeface="Amiri" pitchFamily="2" charset="-78"/>
+                <a:ea typeface="Amiri" pitchFamily="2" charset="-78"/>
                 <a:cs typeface="Amiri" pitchFamily="2" charset="-78"/>
               </a:rPr>
               <a:t>أَسْئِلَةُ التَّفْكِيرِ العَمِيقِ</a:t>
@@ -19339,6 +19478,7 @@
                   <a:srgbClr val="1B3B6F"/>
                 </a:solidFill>
                 <a:latin typeface="Amiri" pitchFamily="2" charset="-78"/>
+                <a:ea typeface="Amiri" pitchFamily="2" charset="-78"/>
                 <a:cs typeface="Amiri" pitchFamily="2" charset="-78"/>
               </a:rPr>
               <a:t>صَحِيحٌ أَنَّ … غَيْرَ أَنَّ …</a:t>
@@ -19415,6 +19555,7 @@
                   <a:srgbClr val="5A6472"/>
                 </a:solidFill>
                 <a:latin typeface="Amiri" pitchFamily="2" charset="-78"/>
+                <a:ea typeface="Amiri" pitchFamily="2" charset="-78"/>
                 <a:cs typeface="Amiri" pitchFamily="2" charset="-78"/>
               </a:rPr>
               <a:t>هَلِ الطَّعَامُ السَّرِيعُ مُشْكِلَةٌ اجْتِمَاعِيَّةٌ؟</a:t>
@@ -19531,6 +19672,7 @@
                   <a:srgbClr val="1B3B6F"/>
                 </a:solidFill>
                 <a:latin typeface="Amiri" pitchFamily="2" charset="-78"/>
+                <a:ea typeface="Amiri" pitchFamily="2" charset="-78"/>
                 <a:cs typeface="Amiri" pitchFamily="2" charset="-78"/>
               </a:rPr>
               <a:t>مِنْ نَاحِيَةٍ … وَمِنْ نَاحِيَةٍ أُخْرَى …</a:t>
@@ -19607,6 +19749,7 @@
                   <a:srgbClr val="5A6472"/>
                 </a:solidFill>
                 <a:latin typeface="Amiri" pitchFamily="2" charset="-78"/>
+                <a:ea typeface="Amiri" pitchFamily="2" charset="-78"/>
                 <a:cs typeface="Amiri" pitchFamily="2" charset="-78"/>
               </a:rPr>
               <a:t>هَلْ تَتَغَيَّرُ الصَّدَاقَةُ مَعَ التِّكْنُولُوجْيَا؟</a:t>
@@ -19723,6 +19866,7 @@
                   <a:srgbClr val="1B3B6F"/>
                 </a:solidFill>
                 <a:latin typeface="Amiri" pitchFamily="2" charset="-78"/>
+                <a:ea typeface="Amiri" pitchFamily="2" charset="-78"/>
                 <a:cs typeface="Amiri" pitchFamily="2" charset="-78"/>
               </a:rPr>
               <a:t>أَرَى أَنَّ … لِأَنَّ … مِمَّا …</a:t>
@@ -19799,6 +19943,7 @@
                   <a:srgbClr val="5A6472"/>
                 </a:solidFill>
                 <a:latin typeface="Amiri" pitchFamily="2" charset="-78"/>
+                <a:ea typeface="Amiri" pitchFamily="2" charset="-78"/>
                 <a:cs typeface="Amiri" pitchFamily="2" charset="-78"/>
               </a:rPr>
               <a:t>مَا أَهَمُّ مَهَارَةٍ لِلْمُسْتَقْبَلِ؟</a:t>
@@ -19915,6 +20060,7 @@
                   <a:srgbClr val="1B3B6F"/>
                 </a:solidFill>
                 <a:latin typeface="Amiri" pitchFamily="2" charset="-78"/>
+                <a:ea typeface="Amiri" pitchFamily="2" charset="-78"/>
                 <a:cs typeface="Amiri" pitchFamily="2" charset="-78"/>
               </a:rPr>
               <a:t>كَانَ أَجْدَادِي … أَمَّا جِيلُنَا فَيَعِيشُ …</a:t>
@@ -19991,6 +20137,7 @@
                   <a:srgbClr val="5A6472"/>
                 </a:solidFill>
                 <a:latin typeface="Amiri" pitchFamily="2" charset="-78"/>
+                <a:ea typeface="Amiri" pitchFamily="2" charset="-78"/>
                 <a:cs typeface="Amiri" pitchFamily="2" charset="-78"/>
               </a:rPr>
               <a:t>كَيْفَ يَخْتَلِفُ جِيلُكَ عَنْ جِيلِ أَجْدَادِكَ؟</a:t>
@@ -20107,6 +20254,7 @@
                   <a:srgbClr val="1B3B6F"/>
                 </a:solidFill>
                 <a:latin typeface="Amiri" pitchFamily="2" charset="-78"/>
+                <a:ea typeface="Amiri" pitchFamily="2" charset="-78"/>
                 <a:cs typeface="Amiri" pitchFamily="2" charset="-78"/>
               </a:rPr>
               <a:t>لَوِ اسْتَطَعْتُ، لَأَضَفْتُ … لِكَيْ …</a:t>
@@ -20183,6 +20331,7 @@
                   <a:srgbClr val="1B3B6F"/>
                 </a:solidFill>
                 <a:latin typeface="Amiri" pitchFamily="2" charset="-78"/>
+                <a:ea typeface="Amiri" pitchFamily="2" charset="-78"/>
                 <a:cs typeface="Amiri" pitchFamily="2" charset="-78"/>
               </a:rPr>
               <a:t>لَوِ اسْتَطَعْتَ أَنْ تُغَيِّرَ شَيْئًا فِي مَدْرَسَتِكَ، فَمَاذَا تُغَيِّرُ؟</a:t>
@@ -20392,6 +20541,7 @@
                   <a:srgbClr val="D4AF37"/>
                 </a:solidFill>
                 <a:latin typeface="Amiri" pitchFamily="2" charset="-78"/>
+                <a:ea typeface="Amiri" pitchFamily="2" charset="-78"/>
                 <a:cs typeface="Amiri" pitchFamily="2" charset="-78"/>
               </a:rPr>
               <a:t>م</a:t>
@@ -20712,6 +20862,7 @@
                   <a:srgbClr val="8A6D1E"/>
                 </a:solidFill>
                 <a:latin typeface="Amiri" pitchFamily="2" charset="-78"/>
+                <a:ea typeface="Amiri" pitchFamily="2" charset="-78"/>
                 <a:cs typeface="Amiri" pitchFamily="2" charset="-78"/>
               </a:rPr>
               <a:t>آدَابُ الصَّفِّ</a:t>
@@ -22243,6 +22394,7 @@
                   <a:srgbClr val="D4AF37"/>
                 </a:solidFill>
                 <a:latin typeface="Amiri" pitchFamily="2" charset="-78"/>
+                <a:ea typeface="Amiri" pitchFamily="2" charset="-78"/>
                 <a:cs typeface="Amiri" pitchFamily="2" charset="-78"/>
               </a:rPr>
               <a:t>م</a:t>
@@ -22563,6 +22715,7 @@
                   <a:srgbClr val="8A6D1E"/>
                 </a:solidFill>
                 <a:latin typeface="Amiri" pitchFamily="2" charset="-78"/>
+                <a:ea typeface="Amiri" pitchFamily="2" charset="-78"/>
                 <a:cs typeface="Amiri" pitchFamily="2" charset="-78"/>
               </a:rPr>
               <a:t>نَمُوذَجُ الإِجَابَةِ</a:t>
@@ -22805,6 +22958,7 @@
                   <a:srgbClr val="1B3B6F"/>
                 </a:solidFill>
                 <a:latin typeface="Amiri" pitchFamily="2" charset="-78"/>
+                <a:ea typeface="Amiri" pitchFamily="2" charset="-78"/>
                 <a:cs typeface="Amiri" pitchFamily="2" charset="-78"/>
               </a:rPr>
               <a:t>آكُلُ الخُبْزَ وَالجُبْنَ، وَأَشْرَبُ الشَّايَ.</a:t>
@@ -22881,6 +23035,7 @@
                   <a:srgbClr val="5A6472"/>
                 </a:solidFill>
                 <a:latin typeface="Amiri" pitchFamily="2" charset="-78"/>
+                <a:ea typeface="Amiri" pitchFamily="2" charset="-78"/>
                 <a:cs typeface="Amiri" pitchFamily="2" charset="-78"/>
               </a:rPr>
               <a:t>مَاذَا تَأْكُلُ فِي الفُطُورِ؟</a:t>
@@ -22997,6 +23152,7 @@
                   <a:srgbClr val="1B3B6F"/>
                 </a:solidFill>
                 <a:latin typeface="Amiri" pitchFamily="2" charset="-78"/>
+                <a:ea typeface="Amiri" pitchFamily="2" charset="-78"/>
                 <a:cs typeface="Amiri" pitchFamily="2" charset="-78"/>
               </a:rPr>
               <a:t>أَعَزُّ أَصْدِقَائِي اسْمُهُ آدَمُ؛ هُوَ طَوِيلٌ وَمَرِحٌ.</a:t>
@@ -23073,6 +23229,7 @@
                   <a:srgbClr val="5A6472"/>
                 </a:solidFill>
                 <a:latin typeface="Amiri" pitchFamily="2" charset="-78"/>
+                <a:ea typeface="Amiri" pitchFamily="2" charset="-78"/>
                 <a:cs typeface="Amiri" pitchFamily="2" charset="-78"/>
               </a:rPr>
               <a:t>صِفْ أَعَزَّ أَصْدِقَائِكَ</a:t>
@@ -23189,6 +23346,7 @@
                   <a:srgbClr val="1B3B6F"/>
                 </a:solidFill>
                 <a:latin typeface="Amiri" pitchFamily="2" charset="-78"/>
+                <a:ea typeface="Amiri" pitchFamily="2" charset="-78"/>
                 <a:cs typeface="Amiri" pitchFamily="2" charset="-78"/>
               </a:rPr>
               <a:t>الطَّقْسُ بَارِدٌ وَغَائِمٌ.</a:t>
@@ -23265,6 +23423,7 @@
                   <a:srgbClr val="5A6472"/>
                 </a:solidFill>
                 <a:latin typeface="Amiri" pitchFamily="2" charset="-78"/>
+                <a:ea typeface="Amiri" pitchFamily="2" charset="-78"/>
                 <a:cs typeface="Amiri" pitchFamily="2" charset="-78"/>
               </a:rPr>
               <a:t>كَيْفَ الطَّقْسُ الآنَ؟</a:t>
@@ -23381,6 +23540,7 @@
                   <a:srgbClr val="1B3B6F"/>
                 </a:solidFill>
                 <a:latin typeface="Amiri" pitchFamily="2" charset="-78"/>
+                <a:ea typeface="Amiri" pitchFamily="2" charset="-78"/>
                 <a:cs typeface="Amiri" pitchFamily="2" charset="-78"/>
               </a:rPr>
               <a:t>أُرِيدُ أَنْ أَكُونَ مُهَنْدِسًا.</a:t>
@@ -23457,6 +23617,7 @@
                   <a:srgbClr val="5A6472"/>
                 </a:solidFill>
                 <a:latin typeface="Amiri" pitchFamily="2" charset="-78"/>
+                <a:ea typeface="Amiri" pitchFamily="2" charset="-78"/>
                 <a:cs typeface="Amiri" pitchFamily="2" charset="-78"/>
               </a:rPr>
               <a:t>مَا الوَظِيفَةُ الَّتِي تُرِيدُهَا؟</a:t>
@@ -23573,6 +23734,7 @@
                   <a:srgbClr val="1B3B6F"/>
                 </a:solidFill>
                 <a:latin typeface="Amiri" pitchFamily="2" charset="-78"/>
+                <a:ea typeface="Amiri" pitchFamily="2" charset="-78"/>
                 <a:cs typeface="Amiri" pitchFamily="2" charset="-78"/>
               </a:rPr>
               <a:t>أُرِيدُ أَنْ أَزُورَ تُرْكِيَا، لِأَنَّ تَارِيخَهَا غَنِيٌّ.</a:t>
@@ -23649,6 +23811,7 @@
                   <a:srgbClr val="5A6472"/>
                 </a:solidFill>
                 <a:latin typeface="Amiri" pitchFamily="2" charset="-78"/>
+                <a:ea typeface="Amiri" pitchFamily="2" charset="-78"/>
                 <a:cs typeface="Amiri" pitchFamily="2" charset="-78"/>
               </a:rPr>
               <a:t>أَيُّ بَلَدٍ تُرِيدُ أَنْ تَزُورَ؟</a:t>
@@ -23871,6 +24034,7 @@
                   <a:srgbClr val="D4AF37"/>
                 </a:solidFill>
                 <a:latin typeface="Amiri" pitchFamily="2" charset="-78"/>
+                <a:ea typeface="Amiri" pitchFamily="2" charset="-78"/>
                 <a:cs typeface="Amiri" pitchFamily="2" charset="-78"/>
               </a:rPr>
               <a:t>م</a:t>
@@ -24191,6 +24355,7 @@
                   <a:srgbClr val="8A6D1E"/>
                 </a:solidFill>
                 <a:latin typeface="Amiri" pitchFamily="2" charset="-78"/>
+                <a:ea typeface="Amiri" pitchFamily="2" charset="-78"/>
                 <a:cs typeface="Amiri" pitchFamily="2" charset="-78"/>
               </a:rPr>
               <a:t>نَمُوذَجُ الإِجَابَةِ</a:t>
@@ -24433,6 +24598,7 @@
                   <a:srgbClr val="1B3B6F"/>
                 </a:solidFill>
                 <a:latin typeface="Amiri" pitchFamily="2" charset="-78"/>
+                <a:ea typeface="Amiri" pitchFamily="2" charset="-78"/>
                 <a:cs typeface="Amiri" pitchFamily="2" charset="-78"/>
               </a:rPr>
               <a:t>أَمْشِي إِلَى المَدْرَسَةِ دَائِمًا، وَكُنْتُ آكُلُ الحَلَوِيَّاتِ كَثِيرًا، أَمَّا الآنَ فَآكُلُ الفَوَاكِهَ.</a:t>
@@ -24509,6 +24675,7 @@
                   <a:srgbClr val="5A6472"/>
                 </a:solidFill>
                 <a:latin typeface="Amiri" pitchFamily="2" charset="-78"/>
+                <a:ea typeface="Amiri" pitchFamily="2" charset="-78"/>
                 <a:cs typeface="Amiri" pitchFamily="2" charset="-78"/>
               </a:rPr>
               <a:t>كَيْفَ تُحَافِظُ عَلَى صِحَّتِكَ؟</a:t>
@@ -24625,6 +24792,7 @@
                   <a:srgbClr val="1B3B6F"/>
                 </a:solidFill>
                 <a:latin typeface="Amiri" pitchFamily="2" charset="-78"/>
+                <a:ea typeface="Amiri" pitchFamily="2" charset="-78"/>
                 <a:cs typeface="Amiri" pitchFamily="2" charset="-78"/>
               </a:rPr>
               <a:t>قَضَيْنَا أُسْبُوعًا فِي إِسْكُتْلَنْدَا؛ وَكَانَتِ الجِبَالُ رَائِعَةً، لٰكِنَّ المَطَرَ لَمْ يَتَوَقَّفْ.</a:t>
@@ -24701,6 +24869,7 @@
                   <a:srgbClr val="5A6472"/>
                 </a:solidFill>
                 <a:latin typeface="Amiri" pitchFamily="2" charset="-78"/>
+                <a:ea typeface="Amiri" pitchFamily="2" charset="-78"/>
                 <a:cs typeface="Amiri" pitchFamily="2" charset="-78"/>
               </a:rPr>
               <a:t>صِفْ عُطْلَةً قَضَيْتَهَا مَعَ عَائِلَتِكَ</a:t>
@@ -24817,6 +24986,7 @@
                   <a:srgbClr val="1B3B6F"/>
                 </a:solidFill>
                 <a:latin typeface="Amiri" pitchFamily="2" charset="-78"/>
+                <a:ea typeface="Amiri" pitchFamily="2" charset="-78"/>
                 <a:cs typeface="Amiri" pitchFamily="2" charset="-78"/>
               </a:rPr>
               <a:t>يَجِبُ أَنْ نُقَلِّلَ البْلَاسْتِيكَ، لِأَنَّهُ يُرْمَى فِي البَحْرِ، مِمَّا يَقْتُلُ الأَسْمَاكَ.</a:t>
@@ -24893,6 +25063,7 @@
                   <a:srgbClr val="5A6472"/>
                 </a:solidFill>
                 <a:latin typeface="Amiri" pitchFamily="2" charset="-78"/>
+                <a:ea typeface="Amiri" pitchFamily="2" charset="-78"/>
                 <a:cs typeface="Amiri" pitchFamily="2" charset="-78"/>
               </a:rPr>
               <a:t>مَا الَّذِي يَجِبُ أَنْ نَفْعَلَهُ لِحِمَايَةِ البِيئَةِ؟</a:t>
@@ -25009,6 +25180,7 @@
                   <a:srgbClr val="1B3B6F"/>
                 </a:solidFill>
                 <a:latin typeface="Amiri" pitchFamily="2" charset="-78"/>
+                <a:ea typeface="Amiri" pitchFamily="2" charset="-78"/>
                 <a:cs typeface="Amiri" pitchFamily="2" charset="-78"/>
               </a:rPr>
               <a:t>أَوَّلًا أَضَعُ جَدْوَلًا، ثُمَّ أَحُلُّ امْتِحَانَاتٍ سَابِقَةً، وَفِي الأُسْبُوعِ الأَخِيرِ سَأُرَاجِعُ الكَلِمَاتِ فَقَطْ.</a:t>
@@ -25085,6 +25257,7 @@
                   <a:srgbClr val="5A6472"/>
                 </a:solidFill>
                 <a:latin typeface="Amiri" pitchFamily="2" charset="-78"/>
+                <a:ea typeface="Amiri" pitchFamily="2" charset="-78"/>
                 <a:cs typeface="Amiri" pitchFamily="2" charset="-78"/>
               </a:rPr>
               <a:t>كَيْفَ تَسْتَعِدُّ لِلِامْتِحَانَاتِ؟</a:t>
@@ -25201,6 +25374,7 @@
                   <a:srgbClr val="1B3B6F"/>
                 </a:solidFill>
                 <a:latin typeface="Amiri" pitchFamily="2" charset="-78"/>
+                <a:ea typeface="Amiri" pitchFamily="2" charset="-78"/>
                 <a:cs typeface="Amiri" pitchFamily="2" charset="-78"/>
               </a:rPr>
               <a:t>فِي بَيْتِنَا نَأْكُلُ مَعًا مُتَأَخِّرِينَ، بَيْنَمَا يَأْكُلُ جِيرَانِي مُبَكِّرًا؛ وَكِلْتَا الثَّقَافَتَيْنِ تُحِبُّ العَائِلَةَ.</a:t>
@@ -25277,6 +25451,7 @@
                   <a:srgbClr val="5A6472"/>
                 </a:solidFill>
                 <a:latin typeface="Amiri" pitchFamily="2" charset="-78"/>
+                <a:ea typeface="Amiri" pitchFamily="2" charset="-78"/>
                 <a:cs typeface="Amiri" pitchFamily="2" charset="-78"/>
               </a:rPr>
               <a:t>قَارِنْ بَيْنَ ثَقَافَتَيْنِ تَعْرِفُهُمَا</a:t>
@@ -25499,6 +25674,7 @@
                   <a:srgbClr val="D4AF37"/>
                 </a:solidFill>
                 <a:latin typeface="Amiri" pitchFamily="2" charset="-78"/>
+                <a:ea typeface="Amiri" pitchFamily="2" charset="-78"/>
                 <a:cs typeface="Amiri" pitchFamily="2" charset="-78"/>
               </a:rPr>
               <a:t>م</a:t>
@@ -25819,6 +25995,7 @@
                   <a:srgbClr val="8A6D1E"/>
                 </a:solidFill>
                 <a:latin typeface="Amiri" pitchFamily="2" charset="-78"/>
+                <a:ea typeface="Amiri" pitchFamily="2" charset="-78"/>
                 <a:cs typeface="Amiri" pitchFamily="2" charset="-78"/>
               </a:rPr>
               <a:t>نَمُوذَجُ الإِجَابَةِ</a:t>
@@ -26061,6 +26238,7 @@
                   <a:srgbClr val="1B3B6F"/>
                 </a:solidFill>
                 <a:latin typeface="Amiri" pitchFamily="2" charset="-78"/>
+                <a:ea typeface="Amiri" pitchFamily="2" charset="-78"/>
                 <a:cs typeface="Amiri" pitchFamily="2" charset="-78"/>
               </a:rPr>
               <a:t>صَحِيحٌ أَنَّهُ رَخِيصٌ وَسَرِيعٌ، غَيْرَ أَنَّهُ يُضْعِفُ صِحَّةَ الأَطْفَالِ، وَيَحْرِمُ العَائِلَاتِ مِنْ وَجْبَةٍ مُشْتَرَكَةٍ.</a:t>
@@ -26137,6 +26315,7 @@
                   <a:srgbClr val="5A6472"/>
                 </a:solidFill>
                 <a:latin typeface="Amiri" pitchFamily="2" charset="-78"/>
+                <a:ea typeface="Amiri" pitchFamily="2" charset="-78"/>
                 <a:cs typeface="Amiri" pitchFamily="2" charset="-78"/>
               </a:rPr>
               <a:t>هَلِ الطَّعَامُ السَّرِيعُ مُشْكِلَةٌ اجْتِمَاعِيَّةٌ؟</a:t>
@@ -26253,6 +26432,7 @@
                   <a:srgbClr val="1B3B6F"/>
                 </a:solidFill>
                 <a:latin typeface="Amiri" pitchFamily="2" charset="-78"/>
+                <a:ea typeface="Amiri" pitchFamily="2" charset="-78"/>
                 <a:cs typeface="Amiri" pitchFamily="2" charset="-78"/>
               </a:rPr>
               <a:t>مِنْ نَاحِيَةٍ، نَبْقَى عَلَى اتِّصَالٍ دَائِمٍ، وَمِنْ نَاحِيَةٍ أُخْرَى، قَلَّتِ اللِّقَاءَاتُ الحَقِيقِيَّةُ الَّتِي تَبْنِي الثِّقَةَ.</a:t>
@@ -26329,6 +26509,7 @@
                   <a:srgbClr val="5A6472"/>
                 </a:solidFill>
                 <a:latin typeface="Amiri" pitchFamily="2" charset="-78"/>
+                <a:ea typeface="Amiri" pitchFamily="2" charset="-78"/>
                 <a:cs typeface="Amiri" pitchFamily="2" charset="-78"/>
               </a:rPr>
               <a:t>هَلْ تَتَغَيَّرُ الصَّدَاقَةُ مَعَ التِّكْنُولُوجْيَا؟</a:t>
@@ -26445,6 +26626,7 @@
                   <a:srgbClr val="1B3B6F"/>
                 </a:solidFill>
                 <a:latin typeface="Amiri" pitchFamily="2" charset="-78"/>
+                <a:ea typeface="Amiri" pitchFamily="2" charset="-78"/>
                 <a:cs typeface="Amiri" pitchFamily="2" charset="-78"/>
               </a:rPr>
               <a:t>أَرَى أَنَّ أَهَمَّهَا القُدْرَةُ عَلَى التَّعَلُّمِ، لِأَنَّ الوَظَائِفَ تَتَغَيَّرُ بِسُرْعَةٍ، مِمَّا يَجْعَلُ مَا نَعْرِفُهُ اليَوْمَ قَدِيمًا غَدًا.</a:t>
@@ -26521,6 +26703,7 @@
                   <a:srgbClr val="5A6472"/>
                 </a:solidFill>
                 <a:latin typeface="Amiri" pitchFamily="2" charset="-78"/>
+                <a:ea typeface="Amiri" pitchFamily="2" charset="-78"/>
                 <a:cs typeface="Amiri" pitchFamily="2" charset="-78"/>
               </a:rPr>
               <a:t>مَا أَهَمُّ مَهَارَةٍ لِلْمُسْتَقْبَلِ؟</a:t>
@@ -26743,6 +26926,7 @@
                   <a:srgbClr val="D4AF37"/>
                 </a:solidFill>
                 <a:latin typeface="Amiri" pitchFamily="2" charset="-78"/>
+                <a:ea typeface="Amiri" pitchFamily="2" charset="-78"/>
                 <a:cs typeface="Amiri" pitchFamily="2" charset="-78"/>
               </a:rPr>
               <a:t>م</a:t>
@@ -27063,6 +27247,7 @@
                   <a:srgbClr val="8A6D1E"/>
                 </a:solidFill>
                 <a:latin typeface="Amiri" pitchFamily="2" charset="-78"/>
+                <a:ea typeface="Amiri" pitchFamily="2" charset="-78"/>
                 <a:cs typeface="Amiri" pitchFamily="2" charset="-78"/>
               </a:rPr>
               <a:t>نَمُوذَجُ الإِجَابَةِ</a:t>
@@ -27305,6 +27490,7 @@
                   <a:srgbClr val="1B3B6F"/>
                 </a:solidFill>
                 <a:latin typeface="Amiri" pitchFamily="2" charset="-78"/>
+                <a:ea typeface="Amiri" pitchFamily="2" charset="-78"/>
                 <a:cs typeface="Amiri" pitchFamily="2" charset="-78"/>
               </a:rPr>
               <a:t>كَانَ أَجْدَادِي يَعِيشُونَ فِي قَرْيَةٍ وَاحِدَةٍ، أَمَّا جِيلُنَا فَيَعِيشُ بَيْنَ لُغَاتٍ وَثَقَافَاتٍ، مِمَّا يَمْنَحُنَا فُرَصًا أَكْثَرَ وَتَحَدِّيَاتٍ جَدِيدَةً.</a:t>
@@ -27381,6 +27567,7 @@
                   <a:srgbClr val="5A6472"/>
                 </a:solidFill>
                 <a:latin typeface="Amiri" pitchFamily="2" charset="-78"/>
+                <a:ea typeface="Amiri" pitchFamily="2" charset="-78"/>
                 <a:cs typeface="Amiri" pitchFamily="2" charset="-78"/>
               </a:rPr>
               <a:t>كَيْفَ يَخْتَلِفُ جِيلُكَ عَنْ جِيلِ أَجْدَادِكَ؟</a:t>
@@ -27497,6 +27684,7 @@
                   <a:srgbClr val="1B3B6F"/>
                 </a:solidFill>
                 <a:latin typeface="Amiri" pitchFamily="2" charset="-78"/>
+                <a:ea typeface="Amiri" pitchFamily="2" charset="-78"/>
                 <a:cs typeface="Amiri" pitchFamily="2" charset="-78"/>
               </a:rPr>
               <a:t>لَوِ اسْتَطَعْتُ، لَأَضَفْتُ حِصَّةً أُسْبُوعِيَّةً لِلطَّبْخِ الصِّحِّيِّ، لِكَيْ يَتَعَلَّمَ الطُّلَّابُ مَهَارَةً يَحْتَاجُونَهَا طُولَ حَيَاتِهِمْ.</a:t>
@@ -27576,6 +27764,7 @@
                   <a:srgbClr val="1B3B6F"/>
                 </a:solidFill>
                 <a:latin typeface="Amiri" pitchFamily="2" charset="-78"/>
+                <a:ea typeface="Amiri" pitchFamily="2" charset="-78"/>
                 <a:cs typeface="Amiri" pitchFamily="2" charset="-78"/>
               </a:rPr>
               <a:t>لَوِ اسْتَطَعْتَ أَنْ تُغَيِّرَ شَيْئًا فِي مَدْرَسَتِكَ، فَمَاذَا تُغَيِّرُ؟</a:t>
@@ -27785,6 +27974,7 @@
                   <a:srgbClr val="D4AF37"/>
                 </a:solidFill>
                 <a:latin typeface="Amiri" pitchFamily="2" charset="-78"/>
+                <a:ea typeface="Amiri" pitchFamily="2" charset="-78"/>
                 <a:cs typeface="Amiri" pitchFamily="2" charset="-78"/>
               </a:rPr>
               <a:t>م</a:t>
@@ -28105,6 +28295,7 @@
                   <a:srgbClr val="8A6D1E"/>
                 </a:solidFill>
                 <a:latin typeface="Amiri" pitchFamily="2" charset="-78"/>
+                <a:ea typeface="Amiri" pitchFamily="2" charset="-78"/>
                 <a:cs typeface="Amiri" pitchFamily="2" charset="-78"/>
               </a:rPr>
               <a:t>قَيِّمْ عَمَلَكَ</a:t>
@@ -29349,6 +29540,7 @@
                   <a:srgbClr val="FFFFFF"/>
                 </a:solidFill>
                 <a:latin typeface="Amiri" pitchFamily="2" charset="-78"/>
+                <a:ea typeface="Amiri" pitchFamily="2" charset="-78"/>
                 <a:cs typeface="Amiri" pitchFamily="2" charset="-78"/>
               </a:rPr>
               <a:t>أَحْسَنْتُمْ! إِلَى اللِّقَاءِ</a:t>
@@ -29501,6 +29693,7 @@
                   <a:srgbClr val="D4AF37"/>
                 </a:solidFill>
                 <a:latin typeface="Amiri" pitchFamily="2" charset="-78"/>
+                <a:ea typeface="Amiri" pitchFamily="2" charset="-78"/>
                 <a:cs typeface="Amiri" pitchFamily="2" charset="-78"/>
               </a:rPr>
               <a:t>وَرْشَةُ الكِتَابَةِ</a:t>
@@ -29634,6 +29827,7 @@
                   <a:srgbClr val="D4AF37"/>
                 </a:solidFill>
                 <a:latin typeface="Amiri" pitchFamily="2" charset="-78"/>
+                <a:ea typeface="Amiri" pitchFamily="2" charset="-78"/>
                 <a:cs typeface="Amiri" pitchFamily="2" charset="-78"/>
               </a:rPr>
               <a:t>م</a:t>
@@ -29954,6 +30148,7 @@
                   <a:srgbClr val="8A6D1E"/>
                 </a:solidFill>
                 <a:latin typeface="Amiri" pitchFamily="2" charset="-78"/>
+                <a:ea typeface="Amiri" pitchFamily="2" charset="-78"/>
                 <a:cs typeface="Amiri" pitchFamily="2" charset="-78"/>
               </a:rPr>
               <a:t>خَرِيطَةُ الوَرْشَةِ</a:t>
@@ -30268,6 +30463,7 @@
                   <a:srgbClr val="1B3B6F"/>
                 </a:solidFill>
                 <a:latin typeface="Amiri" pitchFamily="2" charset="-78"/>
+                <a:ea typeface="Amiri" pitchFamily="2" charset="-78"/>
                 <a:cs typeface="Amiri" pitchFamily="2" charset="-78"/>
               </a:rPr>
               <a:t>كَيْفَ</a:t>
@@ -30544,6 +30740,7 @@
                   <a:srgbClr val="1E6B52"/>
                 </a:solidFill>
                 <a:latin typeface="Amiri" pitchFamily="2" charset="-78"/>
+                <a:ea typeface="Amiri" pitchFamily="2" charset="-78"/>
                 <a:cs typeface="Amiri" pitchFamily="2" charset="-78"/>
               </a:rPr>
               <a:t>تَمْثِيلُ الدَّوْرِ</a:t>
@@ -30820,6 +31017,7 @@
                   <a:srgbClr val="8A6D1E"/>
                 </a:solidFill>
                 <a:latin typeface="Amiri" pitchFamily="2" charset="-78"/>
+                <a:ea typeface="Amiri" pitchFamily="2" charset="-78"/>
                 <a:cs typeface="Amiri" pitchFamily="2" charset="-78"/>
               </a:rPr>
               <a:t>النَّمُوذَجُ</a:t>
@@ -31096,6 +31294,7 @@
                   <a:srgbClr val="1E6B52"/>
                 </a:solidFill>
                 <a:latin typeface="Amiri" pitchFamily="2" charset="-78"/>
+                <a:ea typeface="Amiri" pitchFamily="2" charset="-78"/>
                 <a:cs typeface="Amiri" pitchFamily="2" charset="-78"/>
               </a:rPr>
               <a:t>المُحَادَثَةُ</a:t>
@@ -31372,6 +31571,7 @@
                   <a:srgbClr val="8A6D1E"/>
                 </a:solidFill>
                 <a:latin typeface="Amiri" pitchFamily="2" charset="-78"/>
+                <a:ea typeface="Amiri" pitchFamily="2" charset="-78"/>
                 <a:cs typeface="Amiri" pitchFamily="2" charset="-78"/>
               </a:rPr>
               <a:t>قَيِّمْ</a:t>
@@ -31615,6 +31815,7 @@
                   <a:srgbClr val="D4AF37"/>
                 </a:solidFill>
                 <a:latin typeface="Amiri" pitchFamily="2" charset="-78"/>
+                <a:ea typeface="Amiri" pitchFamily="2" charset="-78"/>
                 <a:cs typeface="Amiri" pitchFamily="2" charset="-78"/>
               </a:rPr>
               <a:t>م</a:t>
@@ -31935,6 +32136,7 @@
                   <a:srgbClr val="8A6D1E"/>
                 </a:solidFill>
                 <a:latin typeface="Amiri" pitchFamily="2" charset="-78"/>
+                <a:ea typeface="Amiri" pitchFamily="2" charset="-78"/>
                 <a:cs typeface="Amiri" pitchFamily="2" charset="-78"/>
               </a:rPr>
               <a:t>امْتِحَانُ التَّحَدُّثِ</a:t>
@@ -32559,6 +32761,7 @@
                   <a:srgbClr val="1B3B6F"/>
                 </a:solidFill>
                 <a:latin typeface="Amiri" pitchFamily="2" charset="-78"/>
+                <a:ea typeface="Amiri" pitchFamily="2" charset="-78"/>
                 <a:cs typeface="Amiri" pitchFamily="2" charset="-78"/>
               </a:rPr>
               <a:t>عَفْوًا، هَلْ يُمْكِنُ أَنْ تُعِيدَ السُّؤَالَ؟</a:t>
@@ -32658,6 +32861,7 @@
                   <a:srgbClr val="1B3B6F"/>
                 </a:solidFill>
                 <a:latin typeface="Amiri" pitchFamily="2" charset="-78"/>
+                <a:ea typeface="Amiri" pitchFamily="2" charset="-78"/>
                 <a:cs typeface="Amiri" pitchFamily="2" charset="-78"/>
               </a:rPr>
               <a:t>لَحْظَةً، دَعْنِي أُفَكِّرُ …</a:t>
@@ -32757,6 +32961,7 @@
                   <a:srgbClr val="1B3B6F"/>
                 </a:solidFill>
                 <a:latin typeface="Amiri" pitchFamily="2" charset="-78"/>
+                <a:ea typeface="Amiri" pitchFamily="2" charset="-78"/>
                 <a:cs typeface="Amiri" pitchFamily="2" charset="-78"/>
               </a:rPr>
               <a:t>أَقْصِدُ …</a:t>
@@ -32928,6 +33133,7 @@
                   <a:srgbClr val="D4AF37"/>
                 </a:solidFill>
                 <a:latin typeface="Amiri" pitchFamily="2" charset="-78"/>
+                <a:ea typeface="Amiri" pitchFamily="2" charset="-78"/>
                 <a:cs typeface="Amiri" pitchFamily="2" charset="-78"/>
               </a:rPr>
               <a:t>م</a:t>
@@ -33248,6 +33454,7 @@
                   <a:srgbClr val="8A6D1E"/>
                 </a:solidFill>
                 <a:latin typeface="Amiri" pitchFamily="2" charset="-78"/>
+                <a:ea typeface="Amiri" pitchFamily="2" charset="-78"/>
                 <a:cs typeface="Amiri" pitchFamily="2" charset="-78"/>
               </a:rPr>
               <a:t>جَاهِزُونَ لِأَيِّ بِطَاقَةٍ</a:t>
@@ -33551,6 +33758,7 @@
                   <a:srgbClr val="1B3B6F"/>
                 </a:solidFill>
                 <a:latin typeface="Amiri" pitchFamily="2" charset="-78"/>
+                <a:ea typeface="Amiri" pitchFamily="2" charset="-78"/>
                 <a:cs typeface="Amiri" pitchFamily="2" charset="-78"/>
               </a:rPr>
               <a:t>تَذْكِرَةُ ذَهَابٍ وَإِيَابٍ</a:t>
@@ -33708,6 +33916,7 @@
                   <a:srgbClr val="1B3B6F"/>
                 </a:solidFill>
                 <a:latin typeface="Amiri" pitchFamily="2" charset="-78"/>
+                <a:ea typeface="Amiri" pitchFamily="2" charset="-78"/>
                 <a:cs typeface="Amiri" pitchFamily="2" charset="-78"/>
               </a:rPr>
               <a:t>رَصِيفٌ</a:t>
@@ -33811,6 +34020,7 @@
                   <a:srgbClr val="1B3B6F"/>
                 </a:solidFill>
                 <a:latin typeface="Amiri" pitchFamily="2" charset="-78"/>
+                <a:ea typeface="Amiri" pitchFamily="2" charset="-78"/>
                 <a:cs typeface="Amiri" pitchFamily="2" charset="-78"/>
               </a:rPr>
               <a:t>ذَهَابٌ فَقَطْ</a:t>
@@ -34076,6 +34286,7 @@
                   <a:srgbClr val="1B3B6F"/>
                 </a:solidFill>
                 <a:latin typeface="Amiri" pitchFamily="2" charset="-78"/>
+                <a:ea typeface="Amiri" pitchFamily="2" charset="-78"/>
                 <a:cs typeface="Amiri" pitchFamily="2" charset="-78"/>
               </a:rPr>
               <a:t>يَنْطَلِقُ القِطَارُ فِي …</a:t>
@@ -34233,6 +34444,7 @@
                   <a:srgbClr val="1B3B6F"/>
                 </a:solidFill>
                 <a:latin typeface="Amiri" pitchFamily="2" charset="-78"/>
+                <a:ea typeface="Amiri" pitchFamily="2" charset="-78"/>
                 <a:cs typeface="Amiri" pitchFamily="2" charset="-78"/>
               </a:rPr>
               <a:t>مُتَأَخِّرٌ</a:t>
@@ -34336,6 +34548,7 @@
                   <a:srgbClr val="1B3B6F"/>
                 </a:solidFill>
                 <a:latin typeface="Amiri" pitchFamily="2" charset="-78"/>
+                <a:ea typeface="Amiri" pitchFamily="2" charset="-78"/>
                 <a:cs typeface="Amiri" pitchFamily="2" charset="-78"/>
               </a:rPr>
               <a:t>يَصِلُ</a:t>
@@ -34601,6 +34814,7 @@
                   <a:srgbClr val="1B3B6F"/>
                 </a:solidFill>
                 <a:latin typeface="Amiri" pitchFamily="2" charset="-78"/>
+                <a:ea typeface="Amiri" pitchFamily="2" charset="-78"/>
                 <a:cs typeface="Amiri" pitchFamily="2" charset="-78"/>
               </a:rPr>
               <a:t>حَقِيبَةٌ سَوْدَاءُ صَغِيرَةٌ</a:t>
@@ -34758,6 +34972,7 @@
                   <a:srgbClr val="1B3B6F"/>
                 </a:solidFill>
                 <a:latin typeface="Amiri" pitchFamily="2" charset="-78"/>
+                <a:ea typeface="Amiri" pitchFamily="2" charset="-78"/>
                 <a:cs typeface="Amiri" pitchFamily="2" charset="-78"/>
               </a:rPr>
               <a:t>فِيهَا</a:t>
@@ -34861,6 +35076,7 @@
                   <a:srgbClr val="1B3B6F"/>
                 </a:solidFill>
                 <a:latin typeface="Amiri" pitchFamily="2" charset="-78"/>
+                <a:ea typeface="Amiri" pitchFamily="2" charset="-78"/>
                 <a:cs typeface="Amiri" pitchFamily="2" charset="-78"/>
               </a:rPr>
               <a:t>مِنَ الجِلْدِ</a:t>
@@ -35126,6 +35342,7 @@
                   <a:srgbClr val="1B3B6F"/>
                 </a:solidFill>
                 <a:latin typeface="Amiri" pitchFamily="2" charset="-78"/>
+                <a:ea typeface="Amiri" pitchFamily="2" charset="-78"/>
                 <a:cs typeface="Amiri" pitchFamily="2" charset="-78"/>
               </a:rPr>
               <a:t>فَقَدْتُ … · ضَاعَ / ضَاعَتْ</a:t>
@@ -35283,6 +35500,7 @@
                   <a:srgbClr val="1B3B6F"/>
                 </a:solidFill>
                 <a:latin typeface="Amiri" pitchFamily="2" charset="-78"/>
+                <a:ea typeface="Amiri" pitchFamily="2" charset="-78"/>
                 <a:cs typeface="Amiri" pitchFamily="2" charset="-78"/>
               </a:rPr>
               <a:t>المَفْقُودَاتُ</a:t>
@@ -35386,6 +35604,7 @@
                   <a:srgbClr val="1B3B6F"/>
                 </a:solidFill>
                 <a:latin typeface="Amiri" pitchFamily="2" charset="-78"/>
+                <a:ea typeface="Amiri" pitchFamily="2" charset="-78"/>
                 <a:cs typeface="Amiri" pitchFamily="2" charset="-78"/>
               </a:rPr>
               <a:t>وَجَدْتُ</a:t>
@@ -35651,6 +35870,7 @@
                   <a:srgbClr val="1B3B6F"/>
                 </a:solidFill>
                 <a:latin typeface="Amiri" pitchFamily="2" charset="-78"/>
+                <a:ea typeface="Amiri" pitchFamily="2" charset="-78"/>
                 <a:cs typeface="Amiri" pitchFamily="2" charset="-78"/>
               </a:rPr>
               <a:t>صَبُورٌ · نَشِيطٌ · مُنَظَّمٌ</a:t>
@@ -35808,6 +36028,7 @@
                   <a:srgbClr val="1B3B6F"/>
                 </a:solidFill>
                 <a:latin typeface="Amiri" pitchFamily="2" charset="-78"/>
+                <a:ea typeface="Amiri" pitchFamily="2" charset="-78"/>
                 <a:cs typeface="Amiri" pitchFamily="2" charset="-78"/>
               </a:rPr>
               <a:t>العَمَلُ الجَمَاعِيُّ</a:t>
@@ -35911,6 +36132,7 @@
                   <a:srgbClr val="1B3B6F"/>
                 </a:solidFill>
                 <a:latin typeface="Amiri" pitchFamily="2" charset="-78"/>
+                <a:ea typeface="Amiri" pitchFamily="2" charset="-78"/>
                 <a:cs typeface="Amiri" pitchFamily="2" charset="-78"/>
               </a:rPr>
               <a:t>صَبُورَةٌ · نَشِيطَةٌ · مُنَظَّمَةٌ</a:t>
@@ -36176,6 +36398,7 @@
                   <a:srgbClr val="1B3B6F"/>
                 </a:solidFill>
                 <a:latin typeface="Amiri" pitchFamily="2" charset="-78"/>
+                <a:ea typeface="Amiri" pitchFamily="2" charset="-78"/>
                 <a:cs typeface="Amiri" pitchFamily="2" charset="-78"/>
               </a:rPr>
               <a:t>أَتَطَوَّعُ فِي …</a:t>
@@ -36333,6 +36556,7 @@
                   <a:srgbClr val="1B3B6F"/>
                 </a:solidFill>
                 <a:latin typeface="Amiri" pitchFamily="2" charset="-78"/>
+                <a:ea typeface="Amiri" pitchFamily="2" charset="-78"/>
                 <a:cs typeface="Amiri" pitchFamily="2" charset="-78"/>
               </a:rPr>
               <a:t>خِبْرَةٌ</a:t>
@@ -36436,6 +36660,7 @@
                   <a:srgbClr val="1B3B6F"/>
                 </a:solidFill>
                 <a:latin typeface="Amiri" pitchFamily="2" charset="-78"/>
+                <a:ea typeface="Amiri" pitchFamily="2" charset="-78"/>
                 <a:cs typeface="Amiri" pitchFamily="2" charset="-78"/>
               </a:rPr>
               <a:t>كُلَّ يَوْمِ سَبْتٍ</a:t>
@@ -36569,6 +36794,7 @@
                   <a:srgbClr val="D4AF37"/>
                 </a:solidFill>
                 <a:latin typeface="Amiri" pitchFamily="2" charset="-78"/>
+                <a:ea typeface="Amiri" pitchFamily="2" charset="-78"/>
                 <a:cs typeface="Amiri" pitchFamily="2" charset="-78"/>
               </a:rPr>
               <a:t>م</a:t>
@@ -36889,6 +37115,7 @@
                   <a:srgbClr val="8A6D1E"/>
                 </a:solidFill>
                 <a:latin typeface="Amiri" pitchFamily="2" charset="-78"/>
+                <a:ea typeface="Amiri" pitchFamily="2" charset="-78"/>
                 <a:cs typeface="Amiri" pitchFamily="2" charset="-78"/>
               </a:rPr>
               <a:t>بِنْيَاتٌ تَرْفَعُ الدَّرَجَةَ</a:t>
@@ -37192,6 +37419,7 @@
                   <a:srgbClr val="1B3B6F"/>
                 </a:solidFill>
                 <a:latin typeface="Amiri" pitchFamily="2" charset="-78"/>
+                <a:ea typeface="Amiri" pitchFamily="2" charset="-78"/>
                 <a:cs typeface="Amiri" pitchFamily="2" charset="-78"/>
               </a:rPr>
               <a:t>السِّيَاحَةُ</a:t>
@@ -37349,6 +37577,7 @@
                   <a:srgbClr val="1B3B6F"/>
                 </a:solidFill>
                 <a:latin typeface="Amiri" pitchFamily="2" charset="-78"/>
+                <a:ea typeface="Amiri" pitchFamily="2" charset="-78"/>
                 <a:cs typeface="Amiri" pitchFamily="2" charset="-78"/>
               </a:rPr>
               <a:t>السُّكَّانُ المَحَلِّيُّونَ</a:t>
@@ -37452,6 +37681,7 @@
                   <a:srgbClr val="1B3B6F"/>
                 </a:solidFill>
                 <a:latin typeface="Amiri" pitchFamily="2" charset="-78"/>
+                <a:ea typeface="Amiri" pitchFamily="2" charset="-78"/>
                 <a:cs typeface="Amiri" pitchFamily="2" charset="-78"/>
               </a:rPr>
               <a:t>سُيَّاحٌ</a:t>
@@ -37717,6 +37947,7 @@
                   <a:srgbClr val="1B3B6F"/>
                 </a:solidFill>
                 <a:latin typeface="Amiri" pitchFamily="2" charset="-78"/>
+                <a:ea typeface="Amiri" pitchFamily="2" charset="-78"/>
                 <a:cs typeface="Amiri" pitchFamily="2" charset="-78"/>
               </a:rPr>
               <a:t>بِسَبَبِ … مِمَّا …</a:t>
@@ -37874,6 +38105,7 @@
                   <a:srgbClr val="1B3B6F"/>
                 </a:solidFill>
                 <a:latin typeface="Amiri" pitchFamily="2" charset="-78"/>
+                <a:ea typeface="Amiri" pitchFamily="2" charset="-78"/>
                 <a:cs typeface="Amiri" pitchFamily="2" charset="-78"/>
               </a:rPr>
               <a:t>نَتِيجَةً لِذٰلِكَ</a:t>
@@ -37977,6 +38209,7 @@
                   <a:srgbClr val="1B3B6F"/>
                 </a:solidFill>
                 <a:latin typeface="Amiri" pitchFamily="2" charset="-78"/>
+                <a:ea typeface="Amiri" pitchFamily="2" charset="-78"/>
                 <a:cs typeface="Amiri" pitchFamily="2" charset="-78"/>
               </a:rPr>
               <a:t>لِذٰلِكَ</a:t>
@@ -38242,6 +38475,7 @@
                   <a:srgbClr val="1B3B6F"/>
                 </a:solidFill>
                 <a:latin typeface="Amiri" pitchFamily="2" charset="-78"/>
+                <a:ea typeface="Amiri" pitchFamily="2" charset="-78"/>
                 <a:cs typeface="Amiri" pitchFamily="2" charset="-78"/>
               </a:rPr>
               <a:t>أَكْثَرُ … مِنْ · بَيْنَمَا</a:t>
@@ -38399,6 +38633,7 @@
                   <a:srgbClr val="1B3B6F"/>
                 </a:solidFill>
                 <a:latin typeface="Amiri" pitchFamily="2" charset="-78"/>
+                <a:ea typeface="Amiri" pitchFamily="2" charset="-78"/>
                 <a:cs typeface="Amiri" pitchFamily="2" charset="-78"/>
               </a:rPr>
               <a:t>مُخْتَلِفٌ لَا أَفْضَلُ</a:t>
@@ -38502,6 +38737,7 @@
                   <a:srgbClr val="1B3B6F"/>
                 </a:solidFill>
                 <a:latin typeface="Amiri" pitchFamily="2" charset="-78"/>
+                <a:ea typeface="Amiri" pitchFamily="2" charset="-78"/>
                 <a:cs typeface="Amiri" pitchFamily="2" charset="-78"/>
               </a:rPr>
               <a:t>أَمَّا … فَهُوَ</a:t>
@@ -38767,6 +39003,7 @@
                   <a:srgbClr val="1B3B6F"/>
                 </a:solidFill>
                 <a:latin typeface="Amiri" pitchFamily="2" charset="-78"/>
+                <a:ea typeface="Amiri" pitchFamily="2" charset="-78"/>
                 <a:cs typeface="Amiri" pitchFamily="2" charset="-78"/>
               </a:rPr>
               <a:t>يُبْنَى · بُنِيَ · تُرْمَى</a:t>
@@ -38924,6 +39161,7 @@
                   <a:srgbClr val="1B3B6F"/>
                 </a:solidFill>
                 <a:latin typeface="Amiri" pitchFamily="2" charset="-78"/>
+                <a:ea typeface="Amiri" pitchFamily="2" charset="-78"/>
                 <a:cs typeface="Amiri" pitchFamily="2" charset="-78"/>
               </a:rPr>
               <a:t>صُنِعَ</a:t>
@@ -39027,6 +39265,7 @@
                   <a:srgbClr val="1B3B6F"/>
                 </a:solidFill>
                 <a:latin typeface="Amiri" pitchFamily="2" charset="-78"/>
+                <a:ea typeface="Amiri" pitchFamily="2" charset="-78"/>
                 <a:cs typeface="Amiri" pitchFamily="2" charset="-78"/>
               </a:rPr>
               <a:t>يُحْتَفَلُ بِهِ</a:t>
@@ -39292,6 +39531,7 @@
                   <a:srgbClr val="1B3B6F"/>
                 </a:solidFill>
                 <a:latin typeface="Amiri" pitchFamily="2" charset="-78"/>
+                <a:ea typeface="Amiri" pitchFamily="2" charset="-78"/>
                 <a:cs typeface="Amiri" pitchFamily="2" charset="-78"/>
               </a:rPr>
               <a:t>كُنْتُ … أَمَّا الآنَ فَأَدْرُسُ …</a:t>
@@ -39449,6 +39689,7 @@
                   <a:srgbClr val="1B3B6F"/>
                 </a:solidFill>
                 <a:latin typeface="Amiri" pitchFamily="2" charset="-78"/>
+                <a:ea typeface="Amiri" pitchFamily="2" charset="-78"/>
                 <a:cs typeface="Amiri" pitchFamily="2" charset="-78"/>
               </a:rPr>
               <a:t>أَطْمَحُ إِلَى أَنْ</a:t>
@@ -39552,6 +39793,7 @@
                   <a:srgbClr val="1B3B6F"/>
                 </a:solidFill>
                 <a:latin typeface="Amiri" pitchFamily="2" charset="-78"/>
+                <a:ea typeface="Amiri" pitchFamily="2" charset="-78"/>
                 <a:cs typeface="Amiri" pitchFamily="2" charset="-78"/>
               </a:rPr>
               <a:t>سَوْفَ</a:t>
@@ -39817,6 +40059,7 @@
                   <a:srgbClr val="1B3B6F"/>
                 </a:solidFill>
                 <a:latin typeface="Amiri" pitchFamily="2" charset="-78"/>
+                <a:ea typeface="Amiri" pitchFamily="2" charset="-78"/>
                 <a:cs typeface="Amiri" pitchFamily="2" charset="-78"/>
               </a:rPr>
               <a:t>صَحِيحٌ أَنَّ … غَيْرَ أَنَّ …</a:t>
@@ -39974,6 +40217,7 @@
                   <a:srgbClr val="1B3B6F"/>
                 </a:solidFill>
                 <a:latin typeface="Amiri" pitchFamily="2" charset="-78"/>
+                <a:ea typeface="Amiri" pitchFamily="2" charset="-78"/>
                 <a:cs typeface="Amiri" pitchFamily="2" charset="-78"/>
               </a:rPr>
               <a:t>إِذَا … فَسَأُسَافِرُ</a:t>
@@ -40077,6 +40321,7 @@
                   <a:srgbClr val="1B3B6F"/>
                 </a:solidFill>
                 <a:latin typeface="Amiri" pitchFamily="2" charset="-78"/>
+                <a:ea typeface="Amiri" pitchFamily="2" charset="-78"/>
                 <a:cs typeface="Amiri" pitchFamily="2" charset="-78"/>
               </a:rPr>
               <a:t>لَوْ كُنْتُ … لَاخْتَرْتُ</a:t>
@@ -40210,6 +40455,7 @@
                   <a:srgbClr val="D4AF37"/>
                 </a:solidFill>
                 <a:latin typeface="Amiri" pitchFamily="2" charset="-78"/>
+                <a:ea typeface="Amiri" pitchFamily="2" charset="-78"/>
                 <a:cs typeface="Amiri" pitchFamily="2" charset="-78"/>
               </a:rPr>
               <a:t>م</a:t>
@@ -40530,6 +40776,7 @@
                   <a:srgbClr val="8A6D1E"/>
                 </a:solidFill>
                 <a:latin typeface="Amiri" pitchFamily="2" charset="-78"/>
+                <a:ea typeface="Amiri" pitchFamily="2" charset="-78"/>
                 <a:cs typeface="Amiri" pitchFamily="2" charset="-78"/>
               </a:rPr>
               <a:t>فِي الغُرَفِ</a:t>
@@ -41706,6 +41953,7 @@
                   <a:srgbClr val="1B3B6F"/>
                 </a:solidFill>
                 <a:latin typeface="Amiri" pitchFamily="2" charset="-78"/>
+                <a:ea typeface="Amiri" pitchFamily="2" charset="-78"/>
                 <a:cs typeface="Amiri" pitchFamily="2" charset="-78"/>
               </a:rPr>
               <a:t>دَوْرُكَ!</a:t>
@@ -41782,6 +42030,7 @@
                   <a:srgbClr val="1B3B6F"/>
                 </a:solidFill>
                 <a:latin typeface="Amiri" pitchFamily="2" charset="-78"/>
+                <a:ea typeface="Amiri" pitchFamily="2" charset="-78"/>
                 <a:cs typeface="Amiri" pitchFamily="2" charset="-78"/>
               </a:rPr>
               <a:t>أَحْسَنْتَ! / أَحْسَنْتِ!</a:t>
@@ -41858,6 +42107,7 @@
                   <a:srgbClr val="1B3B6F"/>
                 </a:solidFill>
                 <a:latin typeface="Amiri" pitchFamily="2" charset="-78"/>
+                <a:ea typeface="Amiri" pitchFamily="2" charset="-78"/>
                 <a:cs typeface="Amiri" pitchFamily="2" charset="-78"/>
               </a:rPr>
               <a:t>تَكَلَّمْ أَكْثَرَ، مِنْ فَضْلِكَ</a:t>
@@ -41934,6 +42184,7 @@
                   <a:srgbClr val="1B3B6F"/>
                 </a:solidFill>
                 <a:latin typeface="Amiri" pitchFamily="2" charset="-78"/>
+                <a:ea typeface="Amiri" pitchFamily="2" charset="-78"/>
                 <a:cs typeface="Amiri" pitchFamily="2" charset="-78"/>
               </a:rPr>
               <a:t>لِمَاذَا؟</a:t>
@@ -42105,6 +42356,7 @@
                   <a:srgbClr val="D4AF37"/>
                 </a:solidFill>
                 <a:latin typeface="Amiri" pitchFamily="2" charset="-78"/>
+                <a:ea typeface="Amiri" pitchFamily="2" charset="-78"/>
                 <a:cs typeface="Amiri" pitchFamily="2" charset="-78"/>
               </a:rPr>
               <a:t>م</a:t>
@@ -42425,6 +42677,7 @@
                   <a:srgbClr val="8A6D1E"/>
                 </a:solidFill>
                 <a:latin typeface="Amiri" pitchFamily="2" charset="-78"/>
+                <a:ea typeface="Amiri" pitchFamily="2" charset="-78"/>
                 <a:cs typeface="Amiri" pitchFamily="2" charset="-78"/>
               </a:rPr>
               <a:t>فِي مَحَطَّةِ القِطَارِ</a:t>
@@ -42705,6 +42958,7 @@
                   <a:srgbClr val="1B3B6F"/>
                 </a:solidFill>
                 <a:latin typeface="Amiri" pitchFamily="2" charset="-78"/>
+                <a:ea typeface="Amiri" pitchFamily="2" charset="-78"/>
                 <a:cs typeface="Amiri" pitchFamily="2" charset="-78"/>
               </a:rPr>
               <a:t>أُرِيدُ أَنْ أُسَافِرَ إِلَى …</a:t>
@@ -42781,6 +43035,7 @@
                   <a:srgbClr val="1B3B6F"/>
                 </a:solidFill>
                 <a:latin typeface="Amiri" pitchFamily="2" charset="-78"/>
+                <a:ea typeface="Amiri" pitchFamily="2" charset="-78"/>
                 <a:cs typeface="Amiri" pitchFamily="2" charset="-78"/>
               </a:rPr>
               <a:t>صَبَاحَ الخَيْرِ، إِلَى أَيْنَ؟</a:t>
@@ -42949,6 +43204,7 @@
                   <a:srgbClr val="1B3B6F"/>
                 </a:solidFill>
                 <a:latin typeface="Amiri" pitchFamily="2" charset="-78"/>
+                <a:ea typeface="Amiri" pitchFamily="2" charset="-78"/>
                 <a:cs typeface="Amiri" pitchFamily="2" charset="-78"/>
               </a:rPr>
               <a:t>لَا، تَذْكِرَةُ …</a:t>
@@ -43025,6 +43281,7 @@
                   <a:srgbClr val="1B3B6F"/>
                 </a:solidFill>
                 <a:latin typeface="Amiri" pitchFamily="2" charset="-78"/>
+                <a:ea typeface="Amiri" pitchFamily="2" charset="-78"/>
                 <a:cs typeface="Amiri" pitchFamily="2" charset="-78"/>
               </a:rPr>
               <a:t>ذَهَابٌ فَقَطْ؟</a:t>
@@ -43193,6 +43450,7 @@
                   <a:srgbClr val="1B3B6F"/>
                 </a:solidFill>
                 <a:latin typeface="Amiri" pitchFamily="2" charset="-78"/>
+                <a:ea typeface="Amiri" pitchFamily="2" charset="-78"/>
                 <a:cs typeface="Amiri" pitchFamily="2" charset="-78"/>
               </a:rPr>
               <a:t>مَتَى يَنْطَلِقُ …؟</a:t>
@@ -43269,6 +43527,7 @@
                   <a:srgbClr val="1B3B6F"/>
                 </a:solidFill>
                 <a:latin typeface="Amiri" pitchFamily="2" charset="-78"/>
+                <a:ea typeface="Amiri" pitchFamily="2" charset="-78"/>
                 <a:cs typeface="Amiri" pitchFamily="2" charset="-78"/>
               </a:rPr>
               <a:t>تَفَضَّلْ. الثَّمَنُ ثَمَانُونَ جُنَيْهًا.</a:t>
@@ -43437,6 +43696,7 @@
                   <a:srgbClr val="1B3B6F"/>
                 </a:solidFill>
                 <a:latin typeface="Amiri" pitchFamily="2" charset="-78"/>
+                <a:ea typeface="Amiri" pitchFamily="2" charset="-78"/>
                 <a:cs typeface="Amiri" pitchFamily="2" charset="-78"/>
               </a:rPr>
               <a:t>مِنْ أَيِّ …؟</a:t>
@@ -43513,6 +43773,7 @@
                   <a:srgbClr val="1B3B6F"/>
                 </a:solidFill>
                 <a:latin typeface="Amiri" pitchFamily="2" charset="-78"/>
+                <a:ea typeface="Amiri" pitchFamily="2" charset="-78"/>
                 <a:cs typeface="Amiri" pitchFamily="2" charset="-78"/>
               </a:rPr>
               <a:t>فِي العَاشِرَةِ وَالرُّبْعِ.</a:t>
@@ -43681,6 +43942,7 @@
                   <a:srgbClr val="1B3B6F"/>
                 </a:solidFill>
                 <a:latin typeface="Amiri" pitchFamily="2" charset="-78"/>
+                <a:ea typeface="Amiri" pitchFamily="2" charset="-78"/>
                 <a:cs typeface="Amiri" pitchFamily="2" charset="-78"/>
               </a:rPr>
               <a:t>لِأَنِّي أُرِيدُ أَنْ …</a:t>
@@ -43757,6 +44019,7 @@
                   <a:srgbClr val="1B3B6F"/>
                 </a:solidFill>
                 <a:latin typeface="Amiri" pitchFamily="2" charset="-78"/>
+                <a:ea typeface="Amiri" pitchFamily="2" charset="-78"/>
                 <a:cs typeface="Amiri" pitchFamily="2" charset="-78"/>
               </a:rPr>
               <a:t>الرَّصِيفُ الثَّالِثُ. لِمَاذَا تُسَافِرُ إِلَى الإِسْكَنْدَرِيَّةِ؟</a:t>
@@ -44031,6 +44294,7 @@
                   <a:srgbClr val="D4AF37"/>
                 </a:solidFill>
                 <a:latin typeface="Amiri" pitchFamily="2" charset="-78"/>
+                <a:ea typeface="Amiri" pitchFamily="2" charset="-78"/>
                 <a:cs typeface="Amiri" pitchFamily="2" charset="-78"/>
               </a:rPr>
               <a:t>م</a:t>
@@ -44351,6 +44615,7 @@
                   <a:srgbClr val="8A6D1E"/>
                 </a:solidFill>
                 <a:latin typeface="Amiri" pitchFamily="2" charset="-78"/>
+                <a:ea typeface="Amiri" pitchFamily="2" charset="-78"/>
                 <a:cs typeface="Amiri" pitchFamily="2" charset="-78"/>
               </a:rPr>
               <a:t>فِي مَكْتَبِ المَفْقُودَاتِ</a:t>
@@ -44631,6 +44896,7 @@
                   <a:srgbClr val="1B3B6F"/>
                 </a:solidFill>
                 <a:latin typeface="Amiri" pitchFamily="2" charset="-78"/>
+                <a:ea typeface="Amiri" pitchFamily="2" charset="-78"/>
                 <a:cs typeface="Amiri" pitchFamily="2" charset="-78"/>
               </a:rPr>
               <a:t>فَقَدْتُ … فِي …</a:t>
@@ -44707,6 +44973,7 @@
                   <a:srgbClr val="1B3B6F"/>
                 </a:solidFill>
                 <a:latin typeface="Amiri" pitchFamily="2" charset="-78"/>
+                <a:ea typeface="Amiri" pitchFamily="2" charset="-78"/>
                 <a:cs typeface="Amiri" pitchFamily="2" charset="-78"/>
               </a:rPr>
               <a:t>نَعَمْ، كَيْفَ أُسَاعِدُكَ؟</a:t>
@@ -44875,6 +45142,7 @@
                   <a:srgbClr val="1B3B6F"/>
                 </a:solidFill>
                 <a:latin typeface="Amiri" pitchFamily="2" charset="-78"/>
+                <a:ea typeface="Amiri" pitchFamily="2" charset="-78"/>
                 <a:cs typeface="Amiri" pitchFamily="2" charset="-78"/>
               </a:rPr>
               <a:t>هِيَ حَقِيبَةٌ … مِنَ …</a:t>
@@ -44951,6 +45219,7 @@
                   <a:srgbClr val="1B3B6F"/>
                 </a:solidFill>
                 <a:latin typeface="Amiri" pitchFamily="2" charset="-78"/>
+                <a:ea typeface="Amiri" pitchFamily="2" charset="-78"/>
                 <a:cs typeface="Amiri" pitchFamily="2" charset="-78"/>
               </a:rPr>
               <a:t>صِفْ لِي الحَقِيبَةَ.</a:t>
@@ -45119,6 +45388,7 @@
                   <a:srgbClr val="1B3B6F"/>
                 </a:solidFill>
                 <a:latin typeface="Amiri" pitchFamily="2" charset="-78"/>
+                <a:ea typeface="Amiri" pitchFamily="2" charset="-78"/>
                 <a:cs typeface="Amiri" pitchFamily="2" charset="-78"/>
               </a:rPr>
               <a:t>كَانَ فِيهَا … وَ…</a:t>
@@ -45195,6 +45465,7 @@
                   <a:srgbClr val="1B3B6F"/>
                 </a:solidFill>
                 <a:latin typeface="Amiri" pitchFamily="2" charset="-78"/>
+                <a:ea typeface="Amiri" pitchFamily="2" charset="-78"/>
                 <a:cs typeface="Amiri" pitchFamily="2" charset="-78"/>
               </a:rPr>
               <a:t>مَاذَا كَانَ فِيهَا؟</a:t>
@@ -45298,6 +45569,7 @@
                   <a:srgbClr val="1B3B6F"/>
                 </a:solidFill>
                 <a:latin typeface="Amiri" pitchFamily="2" charset="-78"/>
+                <a:ea typeface="Amiri" pitchFamily="2" charset="-78"/>
                 <a:cs typeface="Amiri" pitchFamily="2" charset="-78"/>
               </a:rPr>
               <a:t>مَتَى …؟ وَهَلْ …؟</a:t>
@@ -45374,6 +45646,7 @@
                   <a:srgbClr val="1B3B6F"/>
                 </a:solidFill>
                 <a:latin typeface="Amiri" pitchFamily="2" charset="-78"/>
+                <a:ea typeface="Amiri" pitchFamily="2" charset="-78"/>
                 <a:cs typeface="Amiri" pitchFamily="2" charset="-78"/>
               </a:rPr>
               <a:t>سَنَبْحَثُ عَنْهَا.</a:t>
@@ -45477,6 +45750,7 @@
                   <a:srgbClr val="1B3B6F"/>
                 </a:solidFill>
                 <a:latin typeface="Amiri" pitchFamily="2" charset="-78"/>
+                <a:ea typeface="Amiri" pitchFamily="2" charset="-78"/>
                 <a:cs typeface="Amiri" pitchFamily="2" charset="-78"/>
               </a:rPr>
               <a:t>سَأُقِيمُ فِي … قُرْبَ …</a:t>
@@ -45553,6 +45827,7 @@
                   <a:srgbClr val="1B3B6F"/>
                 </a:solidFill>
                 <a:latin typeface="Amiri" pitchFamily="2" charset="-78"/>
+                <a:ea typeface="Amiri" pitchFamily="2" charset="-78"/>
                 <a:cs typeface="Amiri" pitchFamily="2" charset="-78"/>
               </a:rPr>
               <a:t>طَبْعًا. أَيْنَ سَتُقِيمُ فِي القَاهِرَةِ؟</a:t>
@@ -45727,13 +46002,9 @@
     <a:fontScheme name="Office">
       <a:majorFont>
         <a:latin typeface="Calibri Light" panose="020F0302020204030204"/>
-        <a:ea typeface=""/>
-        <a:cs typeface=""/>
-        <a:font script="Jpan" typeface="游ゴシック Light"/>
-        <a:font script="Hang" typeface="맑은 고딕"/>
-        <a:font script="Hans" typeface="等线 Light"/>
-        <a:font script="Hant" typeface="新細明體"/>
-        <a:font script="Arab" typeface="Times New Roman"/>
+        <a:ea typeface="Amiri" pitchFamily="2" charset="-78"/>
+        <a:cs typeface="Amiri" pitchFamily="2" charset="-78"/>
+        <a:font script="Arab" typeface="Amiri"/>
         <a:font script="Hebr" typeface="Times New Roman"/>
         <a:font script="Thai" typeface="Angsana New"/>
         <a:font script="Ethi" typeface="Nyala"/>
@@ -45779,13 +46050,9 @@
       </a:majorFont>
       <a:minorFont>
         <a:latin typeface="Calibri" panose="020F0502020204030204"/>
-        <a:ea typeface=""/>
-        <a:cs typeface=""/>
-        <a:font script="Jpan" typeface="游ゴシック"/>
-        <a:font script="Hang" typeface="맑은 고딕"/>
-        <a:font script="Hans" typeface="等线"/>
-        <a:font script="Hant" typeface="新細明體"/>
-        <a:font script="Arab" typeface="Arial"/>
+        <a:ea typeface="Amiri" pitchFamily="2" charset="-78"/>
+        <a:cs typeface="Amiri" pitchFamily="2" charset="-78"/>
+        <a:font script="Arab" typeface="Amiri"/>
         <a:font script="Hebr" typeface="Arial"/>
         <a:font script="Thai" typeface="Cordia New"/>
         <a:font script="Ethi" typeface="Nyala"/>
